--- a/server/templates/Testing 24-10-2026.pptx
+++ b/server/templates/Testing 24-10-2026.pptx
@@ -10,12 +10,9 @@
     <p:sldId id="258" r:id="rId4"/>
     <p:sldId id="259" r:id="rId5"/>
     <p:sldId id="260" r:id="rId6"/>
-    <p:sldId id="261" r:id="rId7"/>
-    <p:sldId id="262" r:id="rId8"/>
-    <p:sldId id="263" r:id="rId9"/>
   </p:sldIdLst>
   <p:notesMasterIdLst>
-    <p:notesMasterId r:id="rId10"/>
+    <p:notesMasterId r:id="rId7"/>
   </p:notesMasterIdLst>
   <p:sldSz cx="12192000" cy="6858000"/>
   <p:notesSz cx="6858000" cy="12192000"/>
@@ -885,270 +882,6 @@
             <a:fld id="{F7021451-1387-4CA6-816F-3879F97B5CBC}" type="slidenum">
               <a:rPr lang="en-US"/>
               <a:t>5</a:t>
-            </a:fld>
-            <a:endParaRPr lang="en-US"/>
-          </a:p>
-        </p:txBody>
-      </p:sp>
-    </p:spTree>
-    <p:extLst>
-      <p:ext uri="{BB962C8B-B14F-4D97-AF65-F5344CB8AC3E}">
-        <p14:creationId xmlns:p14="http://schemas.microsoft.com/office/powerpoint/2010/main" val="1024086991"/>
-      </p:ext>
-    </p:extLst>
-  </p:cSld>
-  <p:clrMapOvr>
-    <a:masterClrMapping/>
-  </p:clrMapOvr>
-</p:notes>
-</file>
-
-<file path=ppt/notesSlides/notesSlide6.xml><?xml version="1.0" encoding="utf-8"?>
-<p:notes xmlns:a="http://schemas.openxmlformats.org/drawingml/2006/main" xmlns:r="http://schemas.openxmlformats.org/officeDocument/2006/relationships" xmlns:p="http://schemas.openxmlformats.org/presentationml/2006/main">
-  <p:cSld>
-    <p:spTree>
-      <p:nvGrpSpPr>
-        <p:cNvPr id="1" name=""/>
-        <p:cNvGrpSpPr/>
-        <p:nvPr/>
-      </p:nvGrpSpPr>
-      <p:grpSpPr>
-        <a:xfrm>
-          <a:off x="0" y="0"/>
-          <a:ext cx="0" cy="0"/>
-          <a:chOff x="0" y="0"/>
-          <a:chExt cx="0" cy="0"/>
-        </a:xfrm>
-      </p:grpSpPr>
-      <p:sp>
-        <p:nvSpPr>
-          <p:cNvPr id="2" name="Slide Image Placeholder 1"/>
-          <p:cNvSpPr>
-            <a:spLocks noGrp="1" noRot="1" noChangeAspect="1"/>
-          </p:cNvSpPr>
-          <p:nvPr>
-            <p:ph type="sldImg"/>
-          </p:nvPr>
-        </p:nvSpPr>
-        <p:spPr/>
-      </p:sp>
-      <p:sp>
-        <p:nvSpPr>
-          <p:cNvPr id="3" name="Notes Placeholder 2"/>
-          <p:cNvSpPr>
-            <a:spLocks noGrp="1"/>
-          </p:cNvSpPr>
-          <p:nvPr>
-            <p:ph type="body" idx="1"/>
-          </p:nvPr>
-        </p:nvSpPr>
-        <p:spPr/>
-        <p:txBody>
-          <a:bodyPr/>
-          <a:lstStyle/>
-          <a:p>
-            <a:r>
-              <a:rPr lang="en-US" dirty="0"/>
-              <a:t/>
-            </a:r>
-            <a:endParaRPr lang="en-US" dirty="0"/>
-          </a:p>
-        </p:txBody>
-      </p:sp>
-      <p:sp>
-        <p:nvSpPr>
-          <p:cNvPr id="4" name="Slide Number Placeholder 3"/>
-          <p:cNvSpPr>
-            <a:spLocks noGrp="1"/>
-          </p:cNvSpPr>
-          <p:nvPr>
-            <p:ph type="sldNum" sz="quarter" idx="10"/>
-          </p:nvPr>
-        </p:nvSpPr>
-        <p:spPr/>
-        <p:txBody>
-          <a:bodyPr/>
-          <a:lstStyle/>
-          <a:p>
-            <a:fld id="{F7021451-1387-4CA6-816F-3879F97B5CBC}" type="slidenum">
-              <a:rPr lang="en-US"/>
-              <a:t>6</a:t>
-            </a:fld>
-            <a:endParaRPr lang="en-US"/>
-          </a:p>
-        </p:txBody>
-      </p:sp>
-    </p:spTree>
-    <p:extLst>
-      <p:ext uri="{BB962C8B-B14F-4D97-AF65-F5344CB8AC3E}">
-        <p14:creationId xmlns:p14="http://schemas.microsoft.com/office/powerpoint/2010/main" val="1024086991"/>
-      </p:ext>
-    </p:extLst>
-  </p:cSld>
-  <p:clrMapOvr>
-    <a:masterClrMapping/>
-  </p:clrMapOvr>
-</p:notes>
-</file>
-
-<file path=ppt/notesSlides/notesSlide7.xml><?xml version="1.0" encoding="utf-8"?>
-<p:notes xmlns:a="http://schemas.openxmlformats.org/drawingml/2006/main" xmlns:r="http://schemas.openxmlformats.org/officeDocument/2006/relationships" xmlns:p="http://schemas.openxmlformats.org/presentationml/2006/main">
-  <p:cSld>
-    <p:spTree>
-      <p:nvGrpSpPr>
-        <p:cNvPr id="1" name=""/>
-        <p:cNvGrpSpPr/>
-        <p:nvPr/>
-      </p:nvGrpSpPr>
-      <p:grpSpPr>
-        <a:xfrm>
-          <a:off x="0" y="0"/>
-          <a:ext cx="0" cy="0"/>
-          <a:chOff x="0" y="0"/>
-          <a:chExt cx="0" cy="0"/>
-        </a:xfrm>
-      </p:grpSpPr>
-      <p:sp>
-        <p:nvSpPr>
-          <p:cNvPr id="2" name="Slide Image Placeholder 1"/>
-          <p:cNvSpPr>
-            <a:spLocks noGrp="1" noRot="1" noChangeAspect="1"/>
-          </p:cNvSpPr>
-          <p:nvPr>
-            <p:ph type="sldImg"/>
-          </p:nvPr>
-        </p:nvSpPr>
-        <p:spPr/>
-      </p:sp>
-      <p:sp>
-        <p:nvSpPr>
-          <p:cNvPr id="3" name="Notes Placeholder 2"/>
-          <p:cNvSpPr>
-            <a:spLocks noGrp="1"/>
-          </p:cNvSpPr>
-          <p:nvPr>
-            <p:ph type="body" idx="1"/>
-          </p:nvPr>
-        </p:nvSpPr>
-        <p:spPr/>
-        <p:txBody>
-          <a:bodyPr/>
-          <a:lstStyle/>
-          <a:p>
-            <a:r>
-              <a:rPr lang="en-US" dirty="0"/>
-              <a:t/>
-            </a:r>
-            <a:endParaRPr lang="en-US" dirty="0"/>
-          </a:p>
-        </p:txBody>
-      </p:sp>
-      <p:sp>
-        <p:nvSpPr>
-          <p:cNvPr id="4" name="Slide Number Placeholder 3"/>
-          <p:cNvSpPr>
-            <a:spLocks noGrp="1"/>
-          </p:cNvSpPr>
-          <p:nvPr>
-            <p:ph type="sldNum" sz="quarter" idx="10"/>
-          </p:nvPr>
-        </p:nvSpPr>
-        <p:spPr/>
-        <p:txBody>
-          <a:bodyPr/>
-          <a:lstStyle/>
-          <a:p>
-            <a:fld id="{F7021451-1387-4CA6-816F-3879F97B5CBC}" type="slidenum">
-              <a:rPr lang="en-US"/>
-              <a:t>7</a:t>
-            </a:fld>
-            <a:endParaRPr lang="en-US"/>
-          </a:p>
-        </p:txBody>
-      </p:sp>
-    </p:spTree>
-    <p:extLst>
-      <p:ext uri="{BB962C8B-B14F-4D97-AF65-F5344CB8AC3E}">
-        <p14:creationId xmlns:p14="http://schemas.microsoft.com/office/powerpoint/2010/main" val="1024086991"/>
-      </p:ext>
-    </p:extLst>
-  </p:cSld>
-  <p:clrMapOvr>
-    <a:masterClrMapping/>
-  </p:clrMapOvr>
-</p:notes>
-</file>
-
-<file path=ppt/notesSlides/notesSlide8.xml><?xml version="1.0" encoding="utf-8"?>
-<p:notes xmlns:a="http://schemas.openxmlformats.org/drawingml/2006/main" xmlns:r="http://schemas.openxmlformats.org/officeDocument/2006/relationships" xmlns:p="http://schemas.openxmlformats.org/presentationml/2006/main">
-  <p:cSld>
-    <p:spTree>
-      <p:nvGrpSpPr>
-        <p:cNvPr id="1" name=""/>
-        <p:cNvGrpSpPr/>
-        <p:nvPr/>
-      </p:nvGrpSpPr>
-      <p:grpSpPr>
-        <a:xfrm>
-          <a:off x="0" y="0"/>
-          <a:ext cx="0" cy="0"/>
-          <a:chOff x="0" y="0"/>
-          <a:chExt cx="0" cy="0"/>
-        </a:xfrm>
-      </p:grpSpPr>
-      <p:sp>
-        <p:nvSpPr>
-          <p:cNvPr id="2" name="Slide Image Placeholder 1"/>
-          <p:cNvSpPr>
-            <a:spLocks noGrp="1" noRot="1" noChangeAspect="1"/>
-          </p:cNvSpPr>
-          <p:nvPr>
-            <p:ph type="sldImg"/>
-          </p:nvPr>
-        </p:nvSpPr>
-        <p:spPr/>
-      </p:sp>
-      <p:sp>
-        <p:nvSpPr>
-          <p:cNvPr id="3" name="Notes Placeholder 2"/>
-          <p:cNvSpPr>
-            <a:spLocks noGrp="1"/>
-          </p:cNvSpPr>
-          <p:nvPr>
-            <p:ph type="body" idx="1"/>
-          </p:nvPr>
-        </p:nvSpPr>
-        <p:spPr/>
-        <p:txBody>
-          <a:bodyPr/>
-          <a:lstStyle/>
-          <a:p>
-            <a:r>
-              <a:rPr lang="en-US" dirty="0"/>
-              <a:t/>
-            </a:r>
-            <a:endParaRPr lang="en-US" dirty="0"/>
-          </a:p>
-        </p:txBody>
-      </p:sp>
-      <p:sp>
-        <p:nvSpPr>
-          <p:cNvPr id="4" name="Slide Number Placeholder 3"/>
-          <p:cNvSpPr>
-            <a:spLocks noGrp="1"/>
-          </p:cNvSpPr>
-          <p:nvPr>
-            <p:ph type="sldNum" sz="quarter" idx="10"/>
-          </p:nvPr>
-        </p:nvSpPr>
-        <p:spPr/>
-        <p:txBody>
-          <a:bodyPr/>
-          <a:lstStyle/>
-          <a:p>
-            <a:fld id="{F7021451-1387-4CA6-816F-3879F97B5CBC}" type="slidenum">
-              <a:rPr lang="en-US"/>
-              <a:t>8</a:t>
             </a:fld>
             <a:endParaRPr lang="en-US"/>
           </a:p>
@@ -1498,6 +1231,30 @@
           <a:chExt cx="0" cy="0"/>
         </a:xfrm>
       </p:grpSpPr>
+      <p:pic>
+        <p:nvPicPr>
+          <p:cNvPr id="2" name="Image 0" descr="preencoded.png">    </p:cNvPr>
+          <p:cNvPicPr>
+            <a:picLocks noChangeAspect="1"/>
+          </p:cNvPicPr>
+          <p:nvPr/>
+        </p:nvPicPr>
+        <p:blipFill>
+          <a:blip r:embed="rId1"/>
+          <a:stretch>
+            <a:fillRect/>
+          </a:stretch>
+        </p:blipFill>
+        <p:spPr>
+          <a:xfrm>
+            <a:off x="0" y="0"/>
+            <a:ext cx="12191695" cy="6858000"/>
+          </a:xfrm>
+          <a:prstGeom prst="rect">
+            <a:avLst/>
+          </a:prstGeom>
+        </p:spPr>
+      </p:pic>
     </p:spTree>
   </p:cSld>
   <p:clrMapOvr>
@@ -1530,6 +1287,30 @@
           <a:chExt cx="0" cy="0"/>
         </a:xfrm>
       </p:grpSpPr>
+      <p:pic>
+        <p:nvPicPr>
+          <p:cNvPr id="2" name="Image 0" descr="preencoded.png">    </p:cNvPr>
+          <p:cNvPicPr>
+            <a:picLocks noChangeAspect="1"/>
+          </p:cNvPicPr>
+          <p:nvPr/>
+        </p:nvPicPr>
+        <p:blipFill>
+          <a:blip r:embed="rId1"/>
+          <a:stretch>
+            <a:fillRect/>
+          </a:stretch>
+        </p:blipFill>
+        <p:spPr>
+          <a:xfrm>
+            <a:off x="0" y="0"/>
+            <a:ext cx="12191695" cy="6858000"/>
+          </a:xfrm>
+          <a:prstGeom prst="rect">
+            <a:avLst/>
+          </a:prstGeom>
+        </p:spPr>
+      </p:pic>
     </p:spTree>
   </p:cSld>
   <p:clrMapOvr>
@@ -1679,7 +1460,7 @@
       <p:sp>
         <p:nvSpPr>
           <p:cNvPr id="6" name="Text 2">
-            <a:hlinkClick r:id="rId3" tooltip="Open MB-09 in Latest Booking"/>
+            <a:hlinkClick r:id="rId3" tooltip="Open MB-07 in Latest Booking"/>
           </p:cNvPr>
           <p:cNvSpPr/>
           <p:nvPr/>
@@ -1710,7 +1491,7 @@
                 <a:latin typeface="Arial" pitchFamily="34" charset="0"/>
                 <a:ea typeface="Arial" pitchFamily="34" charset="-122"/>
                 <a:cs typeface="Arial" pitchFamily="34" charset="-120"/>
-                <a:hlinkClick r:id="rId3" invalidUrl="" action="" tgtFrame="" tooltip="Open MB-09 in Latest Booking" history="1" highlightClick="0" endSnd="0">
+                <a:hlinkClick r:id="rId3" invalidUrl="" action="" tgtFrame="" tooltip="Open MB-07 in Latest Booking" history="1" highlightClick="0" endSnd="0">
                   <a:extLst>
                     <a:ext uri="{A12FA001-AC4F-418D-AE19-62706E023703}">
                       <ahyp:hlinkClr xmlns:ahyp="http://schemas.microsoft.com/office/drawing/2018/hyperlinkcolor" val="tx"/>
@@ -1718,7 +1499,7 @@
                   </a:extLst>
                 </a:hlinkClick>
               </a:rPr>
-              <a:t>MB - 09</a:t>
+              <a:t>MB - 07</a:t>
             </a:r>
             <a:endParaRPr lang="en-US" sz="2600" dirty="0"/>
           </a:p>
@@ -1796,7 +1577,7 @@
                 <a:ea typeface="Arial" pitchFamily="34" charset="-122"/>
                 <a:cs typeface="Arial" pitchFamily="34" charset="-120"/>
               </a:rPr>
-              <a:t>Shivranjani Bridge- Fcg. Shyamal 4 road Jnc - Right (3)</a:t>
+              <a:t>Shivranjani Bridge- Fcg. Shyamal 4 road Jnc - Left (1)</a:t>
             </a:r>
             <a:endParaRPr lang="en-US" sz="1600" dirty="0"/>
           </a:p>
@@ -2273,7 +2054,7 @@
                 <a:ea typeface="Arial" pitchFamily="34" charset="-122"/>
                 <a:cs typeface="Arial" pitchFamily="34" charset="-120"/>
               </a:rPr>
-              <a:t>Available</a:t>
+              <a:t>Booked till 30 Sept 2026</a:t>
             </a:r>
             <a:endParaRPr lang="en-US" sz="1450" dirty="0"/>
           </a:p>
@@ -2411,9 +2192,75 @@
           <a:chExt cx="0" cy="0"/>
         </a:xfrm>
       </p:grpSpPr>
+      <p:sp>
+        <p:nvSpPr>
+          <p:cNvPr id="2" name="Shape 0"/>
+          <p:cNvSpPr/>
+          <p:nvPr/>
+        </p:nvSpPr>
+        <p:spPr>
+          <a:xfrm>
+            <a:off x="640080" y="640080"/>
+            <a:ext cx="5715000" cy="4663440"/>
+          </a:xfrm>
+          <a:prstGeom prst="roundRect">
+            <a:avLst>
+              <a:gd name="adj" fmla="val 2353"/>
+            </a:avLst>
+          </a:prstGeom>
+          <a:solidFill>
+            <a:srgbClr val="111111"/>
+          </a:solidFill>
+          <a:ln w="19050">
+            <a:solidFill>
+              <a:srgbClr val="2A2A2A"/>
+            </a:solidFill>
+            <a:prstDash val="solid"/>
+          </a:ln>
+        </p:spPr>
+      </p:sp>
+      <p:sp>
+        <p:nvSpPr>
+          <p:cNvPr id="3" name="Text 1"/>
+          <p:cNvSpPr/>
+          <p:nvPr/>
+        </p:nvSpPr>
+        <p:spPr>
+          <a:xfrm>
+            <a:off x="777240" y="2743200"/>
+            <a:ext cx="5440680" cy="548640"/>
+          </a:xfrm>
+          <a:prstGeom prst="rect">
+            <a:avLst/>
+          </a:prstGeom>
+          <a:noFill/>
+          <a:ln/>
+        </p:spPr>
+        <p:txBody>
+          <a:bodyPr wrap="square" rtlCol="0" anchor="ctr"/>
+          <a:lstStyle/>
+          <a:p>
+            <a:pPr algn="ctr" indent="0" marL="0">
+              <a:buNone/>
+            </a:pPr>
+            <a:r>
+              <a:rPr lang="en-US" sz="1800" b="1" dirty="0">
+                <a:solidFill>
+                  <a:srgbClr val="555555"/>
+                </a:solidFill>
+                <a:latin typeface="Arial" pitchFamily="34" charset="0"/>
+                <a:ea typeface="Arial" pitchFamily="34" charset="-122"/>
+                <a:cs typeface="Arial" pitchFamily="34" charset="-120"/>
+              </a:rPr>
+              <a:t>NO SITE PHOTO UPLOADED</a:t>
+            </a:r>
+            <a:endParaRPr lang="en-US" sz="1800" dirty="0"/>
+          </a:p>
+        </p:txBody>
+      </p:sp>
       <p:pic>
         <p:nvPicPr>
-          <p:cNvPr id="2" name="Image 0" descr="preencoded.png">    </p:cNvPr>
+          <p:cNvPr id="4" name="Image 0" descr="preencoded.png">    </p:cNvPr>
           <p:cNvPicPr>
             <a:picLocks noChangeAspect="1"/>
           </p:cNvPicPr>
@@ -2427,30 +2274,6 @@
         </p:blipFill>
         <p:spPr>
           <a:xfrm>
-            <a:off x="640080" y="640080"/>
-            <a:ext cx="5715000" cy="4663440"/>
-          </a:xfrm>
-          <a:prstGeom prst="rect">
-            <a:avLst/>
-          </a:prstGeom>
-        </p:spPr>
-      </p:pic>
-      <p:pic>
-        <p:nvPicPr>
-          <p:cNvPr id="3" name="Image 1" descr="preencoded.png">    </p:cNvPr>
-          <p:cNvPicPr>
-            <a:picLocks noChangeAspect="1"/>
-          </p:cNvPicPr>
-          <p:nvPr/>
-        </p:nvPicPr>
-        <p:blipFill>
-          <a:blip r:embed="rId2"/>
-          <a:stretch>
-            <a:fillRect/>
-          </a:stretch>
-        </p:blipFill>
-        <p:spPr>
-          <a:xfrm>
             <a:off x="640080" y="5532120"/>
             <a:ext cx="1691640" cy="685800"/>
           </a:xfrm>
@@ -2461,7 +2284,7 @@
       </p:pic>
       <p:sp>
         <p:nvSpPr>
-          <p:cNvPr id="4" name="Text 0"/>
+          <p:cNvPr id="5" name="Text 2"/>
           <p:cNvSpPr/>
           <p:nvPr/>
         </p:nvSpPr>
@@ -2500,7 +2323,7 @@
       </p:sp>
       <p:sp>
         <p:nvSpPr>
-          <p:cNvPr id="5" name="Shape 1"/>
+          <p:cNvPr id="6" name="Shape 3"/>
           <p:cNvSpPr/>
           <p:nvPr/>
         </p:nvSpPr>
@@ -2527,8 +2350,8 @@
       </p:sp>
       <p:sp>
         <p:nvSpPr>
-          <p:cNvPr id="6" name="Text 2">
-            <a:hlinkClick r:id="rId3" tooltip="Open MB-15 in Latest Booking"/>
+          <p:cNvPr id="7" name="Text 4">
+            <a:hlinkClick r:id="rId2" tooltip="Open SSV-07 in Latest Booking"/>
           </p:cNvPr>
           <p:cNvSpPr/>
           <p:nvPr/>
@@ -2559,7 +2382,7 @@
                 <a:latin typeface="Arial" pitchFamily="34" charset="0"/>
                 <a:ea typeface="Arial" pitchFamily="34" charset="-122"/>
                 <a:cs typeface="Arial" pitchFamily="34" charset="-120"/>
-                <a:hlinkClick r:id="rId3" invalidUrl="" action="" tgtFrame="" tooltip="Open MB-15 in Latest Booking" history="1" highlightClick="0" endSnd="0">
+                <a:hlinkClick r:id="rId2" invalidUrl="" action="" tgtFrame="" tooltip="Open SSV-07 in Latest Booking" history="1" highlightClick="0" endSnd="0">
                   <a:extLst>
                     <a:ext uri="{A12FA001-AC4F-418D-AE19-62706E023703}">
                       <ahyp:hlinkClr xmlns:ahyp="http://schemas.microsoft.com/office/drawing/2018/hyperlinkcolor" val="tx"/>
@@ -2567,7 +2390,7 @@
                   </a:extLst>
                 </a:hlinkClick>
               </a:rPr>
-              <a:t>MB - 15</a:t>
+              <a:t>SSV - 07</a:t>
             </a:r>
             <a:endParaRPr lang="en-US" sz="2600" dirty="0"/>
           </a:p>
@@ -2575,7 +2398,7 @@
       </p:sp>
       <p:sp>
         <p:nvSpPr>
-          <p:cNvPr id="7" name="Text 3"/>
+          <p:cNvPr id="8" name="Text 5"/>
           <p:cNvSpPr/>
           <p:nvPr/>
         </p:nvSpPr>
@@ -2614,7 +2437,7 @@
       </p:sp>
       <p:sp>
         <p:nvSpPr>
-          <p:cNvPr id="8" name="Text 4"/>
+          <p:cNvPr id="9" name="Text 6"/>
           <p:cNvSpPr/>
           <p:nvPr/>
         </p:nvSpPr>
@@ -2645,7 +2468,7 @@
                 <a:ea typeface="Arial" pitchFamily="34" charset="-122"/>
                 <a:cs typeface="Arial" pitchFamily="34" charset="-120"/>
               </a:rPr>
-              <a:t>ISRO - Nr. Bhavnirjar Gat, Satellite Road, Iscon to Jodhpur Cross Road</a:t>
+              <a:t>Naroda, Krishnanagar Police Station, Opp. Jain Templ</a:t>
             </a:r>
             <a:endParaRPr lang="en-US" sz="1600" dirty="0"/>
           </a:p>
@@ -2653,14 +2476,14 @@
       </p:sp>
       <p:pic>
         <p:nvPicPr>
-          <p:cNvPr id="9" name="Image 2" descr="preencoded.png">    </p:cNvPr>
+          <p:cNvPr id="10" name="Image 1" descr="preencoded.png">    </p:cNvPr>
           <p:cNvPicPr>
             <a:picLocks noChangeAspect="1"/>
           </p:cNvPicPr>
           <p:nvPr/>
         </p:nvPicPr>
         <p:blipFill>
-          <a:blip r:embed="rId4"/>
+          <a:blip r:embed="rId3"/>
           <a:stretch>
             <a:fillRect/>
           </a:stretch>
@@ -2677,7 +2500,7 @@
       </p:pic>
       <p:sp>
         <p:nvSpPr>
-          <p:cNvPr id="10" name="Text 5"/>
+          <p:cNvPr id="11" name="Text 7"/>
           <p:cNvSpPr/>
           <p:nvPr/>
         </p:nvSpPr>
@@ -2730,7 +2553,7 @@
       </p:sp>
       <p:sp>
         <p:nvSpPr>
-          <p:cNvPr id="11" name="Shape 6"/>
+          <p:cNvPr id="12" name="Shape 8"/>
           <p:cNvSpPr/>
           <p:nvPr/>
         </p:nvSpPr>
@@ -2753,14 +2576,14 @@
       </p:sp>
       <p:pic>
         <p:nvPicPr>
-          <p:cNvPr id="12" name="Image 3" descr="preencoded.png">    </p:cNvPr>
+          <p:cNvPr id="13" name="Image 2" descr="preencoded.png">    </p:cNvPr>
           <p:cNvPicPr>
             <a:picLocks noChangeAspect="1"/>
           </p:cNvPicPr>
           <p:nvPr/>
         </p:nvPicPr>
         <p:blipFill>
-          <a:blip r:embed="rId5"/>
+          <a:blip r:embed="rId4"/>
           <a:stretch>
             <a:fillRect/>
           </a:stretch>
@@ -2777,7 +2600,7 @@
       </p:pic>
       <p:sp>
         <p:nvSpPr>
-          <p:cNvPr id="13" name="Text 7"/>
+          <p:cNvPr id="14" name="Text 9"/>
           <p:cNvSpPr/>
           <p:nvPr/>
         </p:nvSpPr>
@@ -2830,7 +2653,7 @@
       </p:sp>
       <p:sp>
         <p:nvSpPr>
-          <p:cNvPr id="14" name="Shape 8"/>
+          <p:cNvPr id="15" name="Shape 10"/>
           <p:cNvSpPr/>
           <p:nvPr/>
         </p:nvSpPr>
@@ -2853,14 +2676,14 @@
       </p:sp>
       <p:pic>
         <p:nvPicPr>
-          <p:cNvPr id="15" name="Image 4" descr="preencoded.png">    </p:cNvPr>
+          <p:cNvPr id="16" name="Image 3" descr="preencoded.png">    </p:cNvPr>
           <p:cNvPicPr>
             <a:picLocks noChangeAspect="1"/>
           </p:cNvPicPr>
           <p:nvPr/>
         </p:nvPicPr>
         <p:blipFill>
-          <a:blip r:embed="rId6"/>
+          <a:blip r:embed="rId5"/>
           <a:stretch>
             <a:fillRect/>
           </a:stretch>
@@ -2877,7 +2700,7 @@
       </p:pic>
       <p:sp>
         <p:nvSpPr>
-          <p:cNvPr id="16" name="Text 9"/>
+          <p:cNvPr id="17" name="Text 11"/>
           <p:cNvSpPr/>
           <p:nvPr/>
         </p:nvSpPr>
@@ -2930,7 +2753,7 @@
       </p:sp>
       <p:sp>
         <p:nvSpPr>
-          <p:cNvPr id="17" name="Shape 10"/>
+          <p:cNvPr id="18" name="Shape 12"/>
           <p:cNvSpPr/>
           <p:nvPr/>
         </p:nvSpPr>
@@ -2953,14 +2776,14 @@
       </p:sp>
       <p:pic>
         <p:nvPicPr>
-          <p:cNvPr id="18" name="Image 5" descr="preencoded.png">    </p:cNvPr>
+          <p:cNvPr id="19" name="Image 4" descr="preencoded.png">    </p:cNvPr>
           <p:cNvPicPr>
             <a:picLocks noChangeAspect="1"/>
           </p:cNvPicPr>
           <p:nvPr/>
         </p:nvPicPr>
         <p:blipFill>
-          <a:blip r:embed="rId7"/>
+          <a:blip r:embed="rId6"/>
           <a:stretch>
             <a:fillRect/>
           </a:stretch>
@@ -2977,7 +2800,7 @@
       </p:pic>
       <p:sp>
         <p:nvSpPr>
-          <p:cNvPr id="19" name="Text 11"/>
+          <p:cNvPr id="20" name="Text 13"/>
           <p:cNvSpPr/>
           <p:nvPr/>
         </p:nvSpPr>
@@ -3030,7 +2853,7 @@
       </p:sp>
       <p:sp>
         <p:nvSpPr>
-          <p:cNvPr id="20" name="Shape 12"/>
+          <p:cNvPr id="21" name="Shape 14"/>
           <p:cNvSpPr/>
           <p:nvPr/>
         </p:nvSpPr>
@@ -3053,14 +2876,14 @@
       </p:sp>
       <p:pic>
         <p:nvPicPr>
-          <p:cNvPr id="21" name="Image 6" descr="preencoded.png">    </p:cNvPr>
+          <p:cNvPr id="22" name="Image 5" descr="preencoded.png">    </p:cNvPr>
           <p:cNvPicPr>
             <a:picLocks noChangeAspect="1"/>
           </p:cNvPicPr>
           <p:nvPr/>
         </p:nvPicPr>
         <p:blipFill>
-          <a:blip r:embed="rId8"/>
+          <a:blip r:embed="rId7"/>
           <a:stretch>
             <a:fillRect/>
           </a:stretch>
@@ -3077,7 +2900,7 @@
       </p:pic>
       <p:sp>
         <p:nvSpPr>
-          <p:cNvPr id="22" name="Text 13"/>
+          <p:cNvPr id="23" name="Text 15"/>
           <p:cNvSpPr/>
           <p:nvPr/>
         </p:nvSpPr>
@@ -3122,7 +2945,7 @@
                 <a:ea typeface="Arial" pitchFamily="34" charset="-122"/>
                 <a:cs typeface="Arial" pitchFamily="34" charset="-120"/>
               </a:rPr>
-              <a:t>Booked till 01 Nov 2026</a:t>
+              <a:t>Available</a:t>
             </a:r>
             <a:endParaRPr lang="en-US" sz="1450" dirty="0"/>
           </a:p>
@@ -3130,7 +2953,7 @@
       </p:sp>
       <p:sp>
         <p:nvSpPr>
-          <p:cNvPr id="23" name="Shape 14"/>
+          <p:cNvPr id="24" name="Shape 16"/>
           <p:cNvSpPr/>
           <p:nvPr/>
         </p:nvSpPr>
@@ -3153,14 +2976,14 @@
       </p:sp>
       <p:pic>
         <p:nvPicPr>
-          <p:cNvPr id="24" name="Image 7" descr="preencoded.png">    </p:cNvPr>
+          <p:cNvPr id="25" name="Image 6" descr="preencoded.png">    </p:cNvPr>
           <p:cNvPicPr>
             <a:picLocks noChangeAspect="1"/>
           </p:cNvPicPr>
           <p:nvPr/>
         </p:nvPicPr>
         <p:blipFill>
-          <a:blip r:embed="rId9"/>
+          <a:blip r:embed="rId8"/>
           <a:stretch>
             <a:fillRect/>
           </a:stretch>
@@ -3177,7 +3000,7 @@
       </p:pic>
       <p:sp>
         <p:nvSpPr>
-          <p:cNvPr id="25" name="Text 15"/>
+          <p:cNvPr id="26" name="Text 17"/>
           <p:cNvSpPr/>
           <p:nvPr/>
         </p:nvSpPr>
@@ -3222,7 +3045,7 @@
                 <a:ea typeface="Arial" pitchFamily="34" charset="-122"/>
                 <a:cs typeface="Arial" pitchFamily="34" charset="-120"/>
               </a:rPr>
-              <a:t>23.028015, 72.51922</a:t>
+              <a:t>23.012345, 72.567890</a:t>
             </a:r>
             <a:endParaRPr lang="en-US" sz="1450" dirty="0"/>
           </a:p>
@@ -3239,2553 +3062,6 @@
 <file path=ppt/slides/slide5.xml><?xml version="1.0" encoding="utf-8"?>
 <p:sld xmlns:a="http://schemas.openxmlformats.org/drawingml/2006/main" xmlns:r="http://schemas.openxmlformats.org/officeDocument/2006/relationships" xmlns:p="http://schemas.openxmlformats.org/presentationml/2006/main">
   <p:cSld name="Slide 5">
-    <p:bg>
-      <p:bgPr>
-        <a:solidFill>
-          <a:srgbClr val="000000"/>
-        </a:solidFill>
-      </p:bgPr>
-    </p:bg>
-    <p:spTree>
-      <p:nvGrpSpPr>
-        <p:cNvPr id="1" name=""/>
-        <p:cNvGrpSpPr/>
-        <p:nvPr/>
-      </p:nvGrpSpPr>
-      <p:grpSpPr>
-        <a:xfrm>
-          <a:off x="0" y="0"/>
-          <a:ext cx="0" cy="0"/>
-          <a:chOff x="0" y="0"/>
-          <a:chExt cx="0" cy="0"/>
-        </a:xfrm>
-      </p:grpSpPr>
-      <p:pic>
-        <p:nvPicPr>
-          <p:cNvPr id="2" name="Image 0" descr="preencoded.png">    </p:cNvPr>
-          <p:cNvPicPr>
-            <a:picLocks noChangeAspect="1"/>
-          </p:cNvPicPr>
-          <p:nvPr/>
-        </p:nvPicPr>
-        <p:blipFill>
-          <a:blip r:embed="rId1"/>
-          <a:stretch>
-            <a:fillRect/>
-          </a:stretch>
-        </p:blipFill>
-        <p:spPr>
-          <a:xfrm>
-            <a:off x="640080" y="640080"/>
-            <a:ext cx="5715000" cy="4663440"/>
-          </a:xfrm>
-          <a:prstGeom prst="rect">
-            <a:avLst/>
-          </a:prstGeom>
-        </p:spPr>
-      </p:pic>
-      <p:pic>
-        <p:nvPicPr>
-          <p:cNvPr id="3" name="Image 1" descr="preencoded.png">    </p:cNvPr>
-          <p:cNvPicPr>
-            <a:picLocks noChangeAspect="1"/>
-          </p:cNvPicPr>
-          <p:nvPr/>
-        </p:nvPicPr>
-        <p:blipFill>
-          <a:blip r:embed="rId2"/>
-          <a:stretch>
-            <a:fillRect/>
-          </a:stretch>
-        </p:blipFill>
-        <p:spPr>
-          <a:xfrm>
-            <a:off x="640080" y="5532120"/>
-            <a:ext cx="1691640" cy="685800"/>
-          </a:xfrm>
-          <a:prstGeom prst="rect">
-            <a:avLst/>
-          </a:prstGeom>
-        </p:spPr>
-      </p:pic>
-      <p:sp>
-        <p:nvSpPr>
-          <p:cNvPr id="4" name="Text 0"/>
-          <p:cNvSpPr/>
-          <p:nvPr/>
-        </p:nvSpPr>
-        <p:spPr>
-          <a:xfrm>
-            <a:off x="6812280" y="640080"/>
-            <a:ext cx="3200400" cy="274320"/>
-          </a:xfrm>
-          <a:prstGeom prst="rect">
-            <a:avLst/>
-          </a:prstGeom>
-          <a:noFill/>
-          <a:ln/>
-        </p:spPr>
-        <p:txBody>
-          <a:bodyPr wrap="square" lIns="0" tIns="0" rIns="0" bIns="0" rtlCol="0" anchor="ctr"/>
-          <a:lstStyle/>
-          <a:p>
-            <a:pPr indent="0" marL="0">
-              <a:buNone/>
-            </a:pPr>
-            <a:r>
-              <a:rPr lang="en-US" sz="1300" dirty="0">
-                <a:solidFill>
-                  <a:srgbClr val="FFFFFF"/>
-                </a:solidFill>
-                <a:latin typeface="Arial" pitchFamily="34" charset="0"/>
-                <a:ea typeface="Arial" pitchFamily="34" charset="-122"/>
-                <a:cs typeface="Arial" pitchFamily="34" charset="-120"/>
-              </a:rPr>
-              <a:t>Site 3</a:t>
-            </a:r>
-            <a:endParaRPr lang="en-US" sz="1300" dirty="0"/>
-          </a:p>
-        </p:txBody>
-      </p:sp>
-      <p:sp>
-        <p:nvSpPr>
-          <p:cNvPr id="5" name="Shape 1"/>
-          <p:cNvSpPr/>
-          <p:nvPr/>
-        </p:nvSpPr>
-        <p:spPr>
-          <a:xfrm>
-            <a:off x="6812280" y="960120"/>
-            <a:ext cx="2423160" cy="658368"/>
-          </a:xfrm>
-          <a:prstGeom prst="roundRect">
-            <a:avLst>
-              <a:gd name="adj" fmla="val 25000"/>
-            </a:avLst>
-          </a:prstGeom>
-          <a:solidFill>
-            <a:srgbClr val="FFC200"/>
-          </a:solidFill>
-          <a:ln w="12700">
-            <a:solidFill>
-              <a:srgbClr val="FFC200"/>
-            </a:solidFill>
-            <a:prstDash val="solid"/>
-          </a:ln>
-        </p:spPr>
-      </p:sp>
-      <p:sp>
-        <p:nvSpPr>
-          <p:cNvPr id="6" name="Text 2">
-            <a:hlinkClick r:id="rId3" tooltip="Open MB-24 in Latest Booking"/>
-          </p:cNvPr>
-          <p:cNvSpPr/>
-          <p:nvPr/>
-        </p:nvSpPr>
-        <p:spPr>
-          <a:xfrm>
-            <a:off x="6812280" y="960120"/>
-            <a:ext cx="2423160" cy="658368"/>
-          </a:xfrm>
-          <a:prstGeom prst="rect">
-            <a:avLst/>
-          </a:prstGeom>
-          <a:noFill/>
-          <a:ln/>
-        </p:spPr>
-        <p:txBody>
-          <a:bodyPr wrap="square" lIns="0" tIns="0" rIns="0" bIns="0" rtlCol="0" anchor="ctr"/>
-          <a:lstStyle/>
-          <a:p>
-            <a:pPr algn="ctr" indent="0" marL="0">
-              <a:buNone/>
-            </a:pPr>
-            <a:r>
-              <a:rPr lang="en-US" sz="2600" b="1" u="sng" dirty="0">
-                <a:solidFill>
-                  <a:srgbClr val="000000"/>
-                </a:solidFill>
-                <a:latin typeface="Arial" pitchFamily="34" charset="0"/>
-                <a:ea typeface="Arial" pitchFamily="34" charset="-122"/>
-                <a:cs typeface="Arial" pitchFamily="34" charset="-120"/>
-                <a:hlinkClick r:id="rId3" invalidUrl="" action="" tgtFrame="" tooltip="Open MB-24 in Latest Booking" history="1" highlightClick="0" endSnd="0">
-                  <a:extLst>
-                    <a:ext uri="{A12FA001-AC4F-418D-AE19-62706E023703}">
-                      <ahyp:hlinkClr xmlns:ahyp="http://schemas.microsoft.com/office/drawing/2018/hyperlinkcolor" val="tx"/>
-                    </a:ext>
-                  </a:extLst>
-                </a:hlinkClick>
-              </a:rPr>
-              <a:t>MB - 24</a:t>
-            </a:r>
-            <a:endParaRPr lang="en-US" sz="2600" dirty="0"/>
-          </a:p>
-        </p:txBody>
-      </p:sp>
-      <p:sp>
-        <p:nvSpPr>
-          <p:cNvPr id="7" name="Text 3"/>
-          <p:cNvSpPr/>
-          <p:nvPr/>
-        </p:nvSpPr>
-        <p:spPr>
-          <a:xfrm>
-            <a:off x="6812280" y="1810512"/>
-            <a:ext cx="4846320" cy="411480"/>
-          </a:xfrm>
-          <a:prstGeom prst="rect">
-            <a:avLst/>
-          </a:prstGeom>
-          <a:noFill/>
-          <a:ln/>
-        </p:spPr>
-        <p:txBody>
-          <a:bodyPr wrap="square" lIns="0" tIns="0" rIns="0" bIns="0" rtlCol="0" anchor="ctr"/>
-          <a:lstStyle/>
-          <a:p>
-            <a:pPr indent="0" marL="0">
-              <a:buNone/>
-            </a:pPr>
-            <a:r>
-              <a:rPr lang="en-US" sz="2400" b="1" dirty="0">
-                <a:solidFill>
-                  <a:srgbClr val="FFFFFF"/>
-                </a:solidFill>
-                <a:latin typeface="Arial" pitchFamily="34" charset="0"/>
-                <a:ea typeface="Arial" pitchFamily="34" charset="-122"/>
-                <a:cs typeface="Arial" pitchFamily="34" charset="-120"/>
-              </a:rPr>
-              <a:t>Ahmedabad</a:t>
-            </a:r>
-            <a:endParaRPr lang="en-US" sz="2400" dirty="0"/>
-          </a:p>
-        </p:txBody>
-      </p:sp>
-      <p:sp>
-        <p:nvSpPr>
-          <p:cNvPr id="8" name="Text 4"/>
-          <p:cNvSpPr/>
-          <p:nvPr/>
-        </p:nvSpPr>
-        <p:spPr>
-          <a:xfrm>
-            <a:off x="6812280" y="2267712"/>
-            <a:ext cx="4846320" cy="384048"/>
-          </a:xfrm>
-          <a:prstGeom prst="rect">
-            <a:avLst/>
-          </a:prstGeom>
-          <a:noFill/>
-          <a:ln/>
-        </p:spPr>
-        <p:txBody>
-          <a:bodyPr wrap="square" lIns="0" tIns="0" rIns="0" bIns="0" rtlCol="0" anchor="ctr"/>
-          <a:lstStyle/>
-          <a:p>
-            <a:pPr indent="0" marL="0">
-              <a:buNone/>
-            </a:pPr>
-            <a:r>
-              <a:rPr lang="en-US" sz="1600" b="1" dirty="0">
-                <a:solidFill>
-                  <a:srgbClr val="FFFFFF"/>
-                </a:solidFill>
-                <a:latin typeface="Arial" pitchFamily="34" charset="0"/>
-                <a:ea typeface="Arial" pitchFamily="34" charset="-122"/>
-                <a:cs typeface="Arial" pitchFamily="34" charset="-120"/>
-              </a:rPr>
-              <a:t>Karnavati Club Fcg Ring Road to SG Highway</a:t>
-            </a:r>
-            <a:endParaRPr lang="en-US" sz="1600" dirty="0"/>
-          </a:p>
-        </p:txBody>
-      </p:sp>
-      <p:pic>
-        <p:nvPicPr>
-          <p:cNvPr id="9" name="Image 2" descr="preencoded.png">    </p:cNvPr>
-          <p:cNvPicPr>
-            <a:picLocks noChangeAspect="1"/>
-          </p:cNvPicPr>
-          <p:nvPr/>
-        </p:nvPicPr>
-        <p:blipFill>
-          <a:blip r:embed="rId4"/>
-          <a:stretch>
-            <a:fillRect/>
-          </a:stretch>
-        </p:blipFill>
-        <p:spPr>
-          <a:xfrm>
-            <a:off x="6812280" y="2852928"/>
-            <a:ext cx="384048" cy="384048"/>
-          </a:xfrm>
-          <a:prstGeom prst="rect">
-            <a:avLst/>
-          </a:prstGeom>
-        </p:spPr>
-      </p:pic>
-      <p:sp>
-        <p:nvSpPr>
-          <p:cNvPr id="10" name="Text 5"/>
-          <p:cNvSpPr/>
-          <p:nvPr/>
-        </p:nvSpPr>
-        <p:spPr>
-          <a:xfrm>
-            <a:off x="7424928" y="2834640"/>
-            <a:ext cx="4389120" cy="402336"/>
-          </a:xfrm>
-          <a:prstGeom prst="rect">
-            <a:avLst/>
-          </a:prstGeom>
-          <a:noFill/>
-          <a:ln/>
-        </p:spPr>
-        <p:txBody>
-          <a:bodyPr wrap="square" lIns="0" tIns="0" rIns="0" bIns="0" rtlCol="0" anchor="ctr"/>
-          <a:lstStyle/>
-          <a:p>
-            <a:pPr indent="0" marL="0">
-              <a:buNone/>
-            </a:pPr>
-            <a:r>
-              <a:rPr lang="en-US" sz="1450" b="1" dirty="0">
-                <a:solidFill>
-                  <a:srgbClr val="FFC200"/>
-                </a:solidFill>
-                <a:latin typeface="Arial" pitchFamily="34" charset="0"/>
-                <a:ea typeface="Arial" pitchFamily="34" charset="-122"/>
-                <a:cs typeface="Arial" pitchFamily="34" charset="-120"/>
-              </a:rPr>
-              <a:t>Size:  </a:t>
-            </a:r>
-            <a:pPr indent="0" marL="0">
-              <a:buNone/>
-            </a:pPr>
-            <a:r>
-              <a:rPr lang="en-US" sz="1450" b="1" dirty="0">
-                <a:solidFill>
-                  <a:srgbClr val="FFFFFF"/>
-                </a:solidFill>
-                <a:latin typeface="Arial" pitchFamily="34" charset="0"/>
-                <a:ea typeface="Arial" pitchFamily="34" charset="-122"/>
-                <a:cs typeface="Arial" pitchFamily="34" charset="-120"/>
-              </a:rPr>
-              <a:t>24x12 ft</a:t>
-            </a:r>
-            <a:endParaRPr lang="en-US" sz="1450" dirty="0"/>
-          </a:p>
-        </p:txBody>
-      </p:sp>
-      <p:sp>
-        <p:nvSpPr>
-          <p:cNvPr id="11" name="Shape 6"/>
-          <p:cNvSpPr/>
-          <p:nvPr/>
-        </p:nvSpPr>
-        <p:spPr>
-          <a:xfrm>
-            <a:off x="7424928" y="3273552"/>
-            <a:ext cx="4389120" cy="0"/>
-          </a:xfrm>
-          <a:prstGeom prst="line">
-            <a:avLst/>
-          </a:prstGeom>
-          <a:noFill/>
-          <a:ln w="10160">
-            <a:solidFill>
-              <a:srgbClr val="333333"/>
-            </a:solidFill>
-            <a:prstDash val="solid"/>
-          </a:ln>
-        </p:spPr>
-      </p:sp>
-      <p:pic>
-        <p:nvPicPr>
-          <p:cNvPr id="12" name="Image 3" descr="preencoded.png">    </p:cNvPr>
-          <p:cNvPicPr>
-            <a:picLocks noChangeAspect="1"/>
-          </p:cNvPicPr>
-          <p:nvPr/>
-        </p:nvPicPr>
-        <p:blipFill>
-          <a:blip r:embed="rId5"/>
-          <a:stretch>
-            <a:fillRect/>
-          </a:stretch>
-        </p:blipFill>
-        <p:spPr>
-          <a:xfrm>
-            <a:off x="6812280" y="3419856"/>
-            <a:ext cx="384048" cy="384048"/>
-          </a:xfrm>
-          <a:prstGeom prst="rect">
-            <a:avLst/>
-          </a:prstGeom>
-        </p:spPr>
-      </p:pic>
-      <p:sp>
-        <p:nvSpPr>
-          <p:cNvPr id="13" name="Text 7"/>
-          <p:cNvSpPr/>
-          <p:nvPr/>
-        </p:nvSpPr>
-        <p:spPr>
-          <a:xfrm>
-            <a:off x="7424928" y="3401568"/>
-            <a:ext cx="4389120" cy="402336"/>
-          </a:xfrm>
-          <a:prstGeom prst="rect">
-            <a:avLst/>
-          </a:prstGeom>
-          <a:noFill/>
-          <a:ln/>
-        </p:spPr>
-        <p:txBody>
-          <a:bodyPr wrap="square" lIns="0" tIns="0" rIns="0" bIns="0" rtlCol="0" anchor="ctr"/>
-          <a:lstStyle/>
-          <a:p>
-            <a:pPr indent="0" marL="0">
-              <a:buNone/>
-            </a:pPr>
-            <a:r>
-              <a:rPr lang="en-US" sz="1450" b="1" dirty="0">
-                <a:solidFill>
-                  <a:srgbClr val="FFC200"/>
-                </a:solidFill>
-                <a:latin typeface="Arial" pitchFamily="34" charset="0"/>
-                <a:ea typeface="Arial" pitchFamily="34" charset="-122"/>
-                <a:cs typeface="Arial" pitchFamily="34" charset="-120"/>
-              </a:rPr>
-              <a:t>Type:  </a:t>
-            </a:r>
-            <a:pPr indent="0" marL="0">
-              <a:buNone/>
-            </a:pPr>
-            <a:r>
-              <a:rPr lang="en-US" sz="1450" b="1" dirty="0">
-                <a:solidFill>
-                  <a:srgbClr val="FFFFFF"/>
-                </a:solidFill>
-                <a:latin typeface="Arial" pitchFamily="34" charset="0"/>
-                <a:ea typeface="Arial" pitchFamily="34" charset="-122"/>
-                <a:cs typeface="Arial" pitchFamily="34" charset="-120"/>
-              </a:rPr>
-              <a:t>Unipole</a:t>
-            </a:r>
-            <a:endParaRPr lang="en-US" sz="1450" dirty="0"/>
-          </a:p>
-        </p:txBody>
-      </p:sp>
-      <p:sp>
-        <p:nvSpPr>
-          <p:cNvPr id="14" name="Shape 8"/>
-          <p:cNvSpPr/>
-          <p:nvPr/>
-        </p:nvSpPr>
-        <p:spPr>
-          <a:xfrm>
-            <a:off x="7424928" y="3840480"/>
-            <a:ext cx="4389120" cy="0"/>
-          </a:xfrm>
-          <a:prstGeom prst="line">
-            <a:avLst/>
-          </a:prstGeom>
-          <a:noFill/>
-          <a:ln w="10160">
-            <a:solidFill>
-              <a:srgbClr val="333333"/>
-            </a:solidFill>
-            <a:prstDash val="solid"/>
-          </a:ln>
-        </p:spPr>
-      </p:sp>
-      <p:pic>
-        <p:nvPicPr>
-          <p:cNvPr id="15" name="Image 4" descr="preencoded.png">    </p:cNvPr>
-          <p:cNvPicPr>
-            <a:picLocks noChangeAspect="1"/>
-          </p:cNvPicPr>
-          <p:nvPr/>
-        </p:nvPicPr>
-        <p:blipFill>
-          <a:blip r:embed="rId6"/>
-          <a:stretch>
-            <a:fillRect/>
-          </a:stretch>
-        </p:blipFill>
-        <p:spPr>
-          <a:xfrm>
-            <a:off x="6812280" y="3986784"/>
-            <a:ext cx="384048" cy="384048"/>
-          </a:xfrm>
-          <a:prstGeom prst="rect">
-            <a:avLst/>
-          </a:prstGeom>
-        </p:spPr>
-      </p:pic>
-      <p:sp>
-        <p:nvSpPr>
-          <p:cNvPr id="16" name="Text 9"/>
-          <p:cNvSpPr/>
-          <p:nvPr/>
-        </p:nvSpPr>
-        <p:spPr>
-          <a:xfrm>
-            <a:off x="7424928" y="3968496"/>
-            <a:ext cx="4389120" cy="402336"/>
-          </a:xfrm>
-          <a:prstGeom prst="rect">
-            <a:avLst/>
-          </a:prstGeom>
-          <a:noFill/>
-          <a:ln/>
-        </p:spPr>
-        <p:txBody>
-          <a:bodyPr wrap="square" lIns="0" tIns="0" rIns="0" bIns="0" rtlCol="0" anchor="ctr"/>
-          <a:lstStyle/>
-          <a:p>
-            <a:pPr indent="0" marL="0">
-              <a:buNone/>
-            </a:pPr>
-            <a:r>
-              <a:rPr lang="en-US" sz="1450" b="1" dirty="0">
-                <a:solidFill>
-                  <a:srgbClr val="FFC200"/>
-                </a:solidFill>
-                <a:latin typeface="Arial" pitchFamily="34" charset="0"/>
-                <a:ea typeface="Arial" pitchFamily="34" charset="-122"/>
-                <a:cs typeface="Arial" pitchFamily="34" charset="-120"/>
-              </a:rPr>
-              <a:t>Illumination:  </a:t>
-            </a:r>
-            <a:pPr indent="0" marL="0">
-              <a:buNone/>
-            </a:pPr>
-            <a:r>
-              <a:rPr lang="en-US" sz="1450" b="1" dirty="0">
-                <a:solidFill>
-                  <a:srgbClr val="FFFFFF"/>
-                </a:solidFill>
-                <a:latin typeface="Arial" pitchFamily="34" charset="0"/>
-                <a:ea typeface="Arial" pitchFamily="34" charset="-122"/>
-                <a:cs typeface="Arial" pitchFamily="34" charset="-120"/>
-              </a:rPr>
-              <a:t>BL</a:t>
-            </a:r>
-            <a:endParaRPr lang="en-US" sz="1450" dirty="0"/>
-          </a:p>
-        </p:txBody>
-      </p:sp>
-      <p:sp>
-        <p:nvSpPr>
-          <p:cNvPr id="17" name="Shape 10"/>
-          <p:cNvSpPr/>
-          <p:nvPr/>
-        </p:nvSpPr>
-        <p:spPr>
-          <a:xfrm>
-            <a:off x="7424928" y="4407408"/>
-            <a:ext cx="4389120" cy="0"/>
-          </a:xfrm>
-          <a:prstGeom prst="line">
-            <a:avLst/>
-          </a:prstGeom>
-          <a:noFill/>
-          <a:ln w="10160">
-            <a:solidFill>
-              <a:srgbClr val="333333"/>
-            </a:solidFill>
-            <a:prstDash val="solid"/>
-          </a:ln>
-        </p:spPr>
-      </p:sp>
-      <p:pic>
-        <p:nvPicPr>
-          <p:cNvPr id="18" name="Image 5" descr="preencoded.png">    </p:cNvPr>
-          <p:cNvPicPr>
-            <a:picLocks noChangeAspect="1"/>
-          </p:cNvPicPr>
-          <p:nvPr/>
-        </p:nvPicPr>
-        <p:blipFill>
-          <a:blip r:embed="rId7"/>
-          <a:stretch>
-            <a:fillRect/>
-          </a:stretch>
-        </p:blipFill>
-        <p:spPr>
-          <a:xfrm>
-            <a:off x="6812280" y="4553712"/>
-            <a:ext cx="384048" cy="384048"/>
-          </a:xfrm>
-          <a:prstGeom prst="rect">
-            <a:avLst/>
-          </a:prstGeom>
-        </p:spPr>
-      </p:pic>
-      <p:sp>
-        <p:nvSpPr>
-          <p:cNvPr id="19" name="Text 11"/>
-          <p:cNvSpPr/>
-          <p:nvPr/>
-        </p:nvSpPr>
-        <p:spPr>
-          <a:xfrm>
-            <a:off x="7424928" y="4535424"/>
-            <a:ext cx="4389120" cy="402336"/>
-          </a:xfrm>
-          <a:prstGeom prst="rect">
-            <a:avLst/>
-          </a:prstGeom>
-          <a:noFill/>
-          <a:ln/>
-        </p:spPr>
-        <p:txBody>
-          <a:bodyPr wrap="square" lIns="0" tIns="0" rIns="0" bIns="0" rtlCol="0" anchor="ctr"/>
-          <a:lstStyle/>
-          <a:p>
-            <a:pPr indent="0" marL="0">
-              <a:buNone/>
-            </a:pPr>
-            <a:r>
-              <a:rPr lang="en-US" sz="1450" b="1" dirty="0">
-                <a:solidFill>
-                  <a:srgbClr val="FFC200"/>
-                </a:solidFill>
-                <a:latin typeface="Arial" pitchFamily="34" charset="0"/>
-                <a:ea typeface="Arial" pitchFamily="34" charset="-122"/>
-                <a:cs typeface="Arial" pitchFamily="34" charset="-120"/>
-              </a:rPr>
-              <a:t>Adv.fee per month:  </a:t>
-            </a:r>
-            <a:pPr indent="0" marL="0">
-              <a:buNone/>
-            </a:pPr>
-            <a:r>
-              <a:rPr lang="en-US" sz="1450" b="1" dirty="0">
-                <a:solidFill>
-                  <a:srgbClr val="FFFFFF"/>
-                </a:solidFill>
-                <a:latin typeface="Arial" pitchFamily="34" charset="0"/>
-                <a:ea typeface="Arial" pitchFamily="34" charset="-122"/>
-                <a:cs typeface="Arial" pitchFamily="34" charset="-120"/>
-              </a:rPr>
-              <a:t>₹ 2,25,000/-</a:t>
-            </a:r>
-            <a:endParaRPr lang="en-US" sz="1450" dirty="0"/>
-          </a:p>
-        </p:txBody>
-      </p:sp>
-      <p:sp>
-        <p:nvSpPr>
-          <p:cNvPr id="20" name="Shape 12"/>
-          <p:cNvSpPr/>
-          <p:nvPr/>
-        </p:nvSpPr>
-        <p:spPr>
-          <a:xfrm>
-            <a:off x="7424928" y="4974336"/>
-            <a:ext cx="4389120" cy="0"/>
-          </a:xfrm>
-          <a:prstGeom prst="line">
-            <a:avLst/>
-          </a:prstGeom>
-          <a:noFill/>
-          <a:ln w="10160">
-            <a:solidFill>
-              <a:srgbClr val="333333"/>
-            </a:solidFill>
-            <a:prstDash val="solid"/>
-          </a:ln>
-        </p:spPr>
-      </p:sp>
-      <p:pic>
-        <p:nvPicPr>
-          <p:cNvPr id="21" name="Image 6" descr="preencoded.png">    </p:cNvPr>
-          <p:cNvPicPr>
-            <a:picLocks noChangeAspect="1"/>
-          </p:cNvPicPr>
-          <p:nvPr/>
-        </p:nvPicPr>
-        <p:blipFill>
-          <a:blip r:embed="rId8"/>
-          <a:stretch>
-            <a:fillRect/>
-          </a:stretch>
-        </p:blipFill>
-        <p:spPr>
-          <a:xfrm>
-            <a:off x="6812280" y="5120640"/>
-            <a:ext cx="384048" cy="384048"/>
-          </a:xfrm>
-          <a:prstGeom prst="rect">
-            <a:avLst/>
-          </a:prstGeom>
-        </p:spPr>
-      </p:pic>
-      <p:sp>
-        <p:nvSpPr>
-          <p:cNvPr id="22" name="Text 13"/>
-          <p:cNvSpPr/>
-          <p:nvPr/>
-        </p:nvSpPr>
-        <p:spPr>
-          <a:xfrm>
-            <a:off x="7424928" y="5102352"/>
-            <a:ext cx="4389120" cy="402336"/>
-          </a:xfrm>
-          <a:prstGeom prst="rect">
-            <a:avLst/>
-          </a:prstGeom>
-          <a:noFill/>
-          <a:ln/>
-        </p:spPr>
-        <p:txBody>
-          <a:bodyPr wrap="square" lIns="0" tIns="0" rIns="0" bIns="0" rtlCol="0" anchor="ctr"/>
-          <a:lstStyle/>
-          <a:p>
-            <a:pPr indent="0" marL="0">
-              <a:buNone/>
-            </a:pPr>
-            <a:r>
-              <a:rPr lang="en-US" sz="1450" b="1" dirty="0">
-                <a:solidFill>
-                  <a:srgbClr val="FFC200"/>
-                </a:solidFill>
-                <a:latin typeface="Arial" pitchFamily="34" charset="0"/>
-                <a:ea typeface="Arial" pitchFamily="34" charset="-122"/>
-                <a:cs typeface="Arial" pitchFamily="34" charset="-120"/>
-              </a:rPr>
-              <a:t>Availability:  </a:t>
-            </a:r>
-            <a:pPr indent="0" marL="0">
-              <a:buNone/>
-            </a:pPr>
-            <a:r>
-              <a:rPr lang="en-US" sz="1450" b="1" dirty="0">
-                <a:solidFill>
-                  <a:srgbClr val="FFFFFF"/>
-                </a:solidFill>
-                <a:latin typeface="Arial" pitchFamily="34" charset="0"/>
-                <a:ea typeface="Arial" pitchFamily="34" charset="-122"/>
-                <a:cs typeface="Arial" pitchFamily="34" charset="-120"/>
-              </a:rPr>
-              <a:t>Booked till 10 Nov 2026</a:t>
-            </a:r>
-            <a:endParaRPr lang="en-US" sz="1450" dirty="0"/>
-          </a:p>
-        </p:txBody>
-      </p:sp>
-      <p:sp>
-        <p:nvSpPr>
-          <p:cNvPr id="23" name="Shape 14"/>
-          <p:cNvSpPr/>
-          <p:nvPr/>
-        </p:nvSpPr>
-        <p:spPr>
-          <a:xfrm>
-            <a:off x="7424928" y="5541264"/>
-            <a:ext cx="4389120" cy="0"/>
-          </a:xfrm>
-          <a:prstGeom prst="line">
-            <a:avLst/>
-          </a:prstGeom>
-          <a:noFill/>
-          <a:ln w="10160">
-            <a:solidFill>
-              <a:srgbClr val="333333"/>
-            </a:solidFill>
-            <a:prstDash val="solid"/>
-          </a:ln>
-        </p:spPr>
-      </p:sp>
-      <p:pic>
-        <p:nvPicPr>
-          <p:cNvPr id="24" name="Image 7" descr="preencoded.png">    </p:cNvPr>
-          <p:cNvPicPr>
-            <a:picLocks noChangeAspect="1"/>
-          </p:cNvPicPr>
-          <p:nvPr/>
-        </p:nvPicPr>
-        <p:blipFill>
-          <a:blip r:embed="rId9"/>
-          <a:stretch>
-            <a:fillRect/>
-          </a:stretch>
-        </p:blipFill>
-        <p:spPr>
-          <a:xfrm>
-            <a:off x="6812280" y="5687568"/>
-            <a:ext cx="384048" cy="384048"/>
-          </a:xfrm>
-          <a:prstGeom prst="rect">
-            <a:avLst/>
-          </a:prstGeom>
-        </p:spPr>
-      </p:pic>
-      <p:sp>
-        <p:nvSpPr>
-          <p:cNvPr id="25" name="Text 15"/>
-          <p:cNvSpPr/>
-          <p:nvPr/>
-        </p:nvSpPr>
-        <p:spPr>
-          <a:xfrm>
-            <a:off x="7424928" y="5669280"/>
-            <a:ext cx="4389120" cy="402336"/>
-          </a:xfrm>
-          <a:prstGeom prst="rect">
-            <a:avLst/>
-          </a:prstGeom>
-          <a:noFill/>
-          <a:ln/>
-        </p:spPr>
-        <p:txBody>
-          <a:bodyPr wrap="square" lIns="0" tIns="0" rIns="0" bIns="0" rtlCol="0" anchor="ctr"/>
-          <a:lstStyle/>
-          <a:p>
-            <a:pPr indent="0" marL="0">
-              <a:buNone/>
-            </a:pPr>
-            <a:r>
-              <a:rPr lang="en-US" sz="1450" b="1" dirty="0">
-                <a:solidFill>
-                  <a:srgbClr val="FFC200"/>
-                </a:solidFill>
-                <a:latin typeface="Arial" pitchFamily="34" charset="0"/>
-                <a:ea typeface="Arial" pitchFamily="34" charset="-122"/>
-                <a:cs typeface="Arial" pitchFamily="34" charset="-120"/>
-              </a:rPr>
-              <a:t>Location Coordinates:  </a:t>
-            </a:r>
-            <a:pPr indent="0" marL="0">
-              <a:buNone/>
-            </a:pPr>
-            <a:r>
-              <a:rPr lang="en-US" sz="1450" b="1" dirty="0">
-                <a:solidFill>
-                  <a:srgbClr val="FFFFFF"/>
-                </a:solidFill>
-                <a:latin typeface="Arial" pitchFamily="34" charset="0"/>
-                <a:ea typeface="Arial" pitchFamily="34" charset="-122"/>
-                <a:cs typeface="Arial" pitchFamily="34" charset="-120"/>
-              </a:rPr>
-              <a:t>23.018839, 72.501663</a:t>
-            </a:r>
-            <a:endParaRPr lang="en-US" sz="1450" dirty="0"/>
-          </a:p>
-        </p:txBody>
-      </p:sp>
-    </p:spTree>
-  </p:cSld>
-  <p:clrMapOvr>
-    <a:masterClrMapping/>
-  </p:clrMapOvr>
-</p:sld>
-</file>
-
-<file path=ppt/slides/slide6.xml><?xml version="1.0" encoding="utf-8"?>
-<p:sld xmlns:a="http://schemas.openxmlformats.org/drawingml/2006/main" xmlns:r="http://schemas.openxmlformats.org/officeDocument/2006/relationships" xmlns:p="http://schemas.openxmlformats.org/presentationml/2006/main">
-  <p:cSld name="Slide 6">
-    <p:bg>
-      <p:bgPr>
-        <a:solidFill>
-          <a:srgbClr val="000000"/>
-        </a:solidFill>
-      </p:bgPr>
-    </p:bg>
-    <p:spTree>
-      <p:nvGrpSpPr>
-        <p:cNvPr id="1" name=""/>
-        <p:cNvGrpSpPr/>
-        <p:nvPr/>
-      </p:nvGrpSpPr>
-      <p:grpSpPr>
-        <a:xfrm>
-          <a:off x="0" y="0"/>
-          <a:ext cx="0" cy="0"/>
-          <a:chOff x="0" y="0"/>
-          <a:chExt cx="0" cy="0"/>
-        </a:xfrm>
-      </p:grpSpPr>
-      <p:pic>
-        <p:nvPicPr>
-          <p:cNvPr id="2" name="Image 0" descr="preencoded.png">    </p:cNvPr>
-          <p:cNvPicPr>
-            <a:picLocks noChangeAspect="1"/>
-          </p:cNvPicPr>
-          <p:nvPr/>
-        </p:nvPicPr>
-        <p:blipFill>
-          <a:blip r:embed="rId1"/>
-          <a:stretch>
-            <a:fillRect/>
-          </a:stretch>
-        </p:blipFill>
-        <p:spPr>
-          <a:xfrm>
-            <a:off x="640080" y="640080"/>
-            <a:ext cx="5715000" cy="4663440"/>
-          </a:xfrm>
-          <a:prstGeom prst="rect">
-            <a:avLst/>
-          </a:prstGeom>
-        </p:spPr>
-      </p:pic>
-      <p:pic>
-        <p:nvPicPr>
-          <p:cNvPr id="3" name="Image 1" descr="preencoded.png">    </p:cNvPr>
-          <p:cNvPicPr>
-            <a:picLocks noChangeAspect="1"/>
-          </p:cNvPicPr>
-          <p:nvPr/>
-        </p:nvPicPr>
-        <p:blipFill>
-          <a:blip r:embed="rId2"/>
-          <a:stretch>
-            <a:fillRect/>
-          </a:stretch>
-        </p:blipFill>
-        <p:spPr>
-          <a:xfrm>
-            <a:off x="640080" y="5532120"/>
-            <a:ext cx="1691640" cy="685800"/>
-          </a:xfrm>
-          <a:prstGeom prst="rect">
-            <a:avLst/>
-          </a:prstGeom>
-        </p:spPr>
-      </p:pic>
-      <p:sp>
-        <p:nvSpPr>
-          <p:cNvPr id="4" name="Text 0"/>
-          <p:cNvSpPr/>
-          <p:nvPr/>
-        </p:nvSpPr>
-        <p:spPr>
-          <a:xfrm>
-            <a:off x="6812280" y="640080"/>
-            <a:ext cx="3200400" cy="274320"/>
-          </a:xfrm>
-          <a:prstGeom prst="rect">
-            <a:avLst/>
-          </a:prstGeom>
-          <a:noFill/>
-          <a:ln/>
-        </p:spPr>
-        <p:txBody>
-          <a:bodyPr wrap="square" lIns="0" tIns="0" rIns="0" bIns="0" rtlCol="0" anchor="ctr"/>
-          <a:lstStyle/>
-          <a:p>
-            <a:pPr indent="0" marL="0">
-              <a:buNone/>
-            </a:pPr>
-            <a:r>
-              <a:rPr lang="en-US" sz="1300" dirty="0">
-                <a:solidFill>
-                  <a:srgbClr val="FFFFFF"/>
-                </a:solidFill>
-                <a:latin typeface="Arial" pitchFamily="34" charset="0"/>
-                <a:ea typeface="Arial" pitchFamily="34" charset="-122"/>
-                <a:cs typeface="Arial" pitchFamily="34" charset="-120"/>
-              </a:rPr>
-              <a:t>Site 4</a:t>
-            </a:r>
-            <a:endParaRPr lang="en-US" sz="1300" dirty="0"/>
-          </a:p>
-        </p:txBody>
-      </p:sp>
-      <p:sp>
-        <p:nvSpPr>
-          <p:cNvPr id="5" name="Shape 1"/>
-          <p:cNvSpPr/>
-          <p:nvPr/>
-        </p:nvSpPr>
-        <p:spPr>
-          <a:xfrm>
-            <a:off x="6812280" y="960120"/>
-            <a:ext cx="2423160" cy="658368"/>
-          </a:xfrm>
-          <a:prstGeom prst="roundRect">
-            <a:avLst>
-              <a:gd name="adj" fmla="val 25000"/>
-            </a:avLst>
-          </a:prstGeom>
-          <a:solidFill>
-            <a:srgbClr val="FFC200"/>
-          </a:solidFill>
-          <a:ln w="12700">
-            <a:solidFill>
-              <a:srgbClr val="FFC200"/>
-            </a:solidFill>
-            <a:prstDash val="solid"/>
-          </a:ln>
-        </p:spPr>
-      </p:sp>
-      <p:sp>
-        <p:nvSpPr>
-          <p:cNvPr id="6" name="Text 2">
-            <a:hlinkClick r:id="rId3" tooltip="Open MB-32 in Latest Booking"/>
-          </p:cNvPr>
-          <p:cNvSpPr/>
-          <p:nvPr/>
-        </p:nvSpPr>
-        <p:spPr>
-          <a:xfrm>
-            <a:off x="6812280" y="960120"/>
-            <a:ext cx="2423160" cy="658368"/>
-          </a:xfrm>
-          <a:prstGeom prst="rect">
-            <a:avLst/>
-          </a:prstGeom>
-          <a:noFill/>
-          <a:ln/>
-        </p:spPr>
-        <p:txBody>
-          <a:bodyPr wrap="square" lIns="0" tIns="0" rIns="0" bIns="0" rtlCol="0" anchor="ctr"/>
-          <a:lstStyle/>
-          <a:p>
-            <a:pPr algn="ctr" indent="0" marL="0">
-              <a:buNone/>
-            </a:pPr>
-            <a:r>
-              <a:rPr lang="en-US" sz="2600" b="1" u="sng" dirty="0">
-                <a:solidFill>
-                  <a:srgbClr val="000000"/>
-                </a:solidFill>
-                <a:latin typeface="Arial" pitchFamily="34" charset="0"/>
-                <a:ea typeface="Arial" pitchFamily="34" charset="-122"/>
-                <a:cs typeface="Arial" pitchFamily="34" charset="-120"/>
-                <a:hlinkClick r:id="rId3" invalidUrl="" action="" tgtFrame="" tooltip="Open MB-32 in Latest Booking" history="1" highlightClick="0" endSnd="0">
-                  <a:extLst>
-                    <a:ext uri="{A12FA001-AC4F-418D-AE19-62706E023703}">
-                      <ahyp:hlinkClr xmlns:ahyp="http://schemas.microsoft.com/office/drawing/2018/hyperlinkcolor" val="tx"/>
-                    </a:ext>
-                  </a:extLst>
-                </a:hlinkClick>
-              </a:rPr>
-              <a:t>MB - 32</a:t>
-            </a:r>
-            <a:endParaRPr lang="en-US" sz="2600" dirty="0"/>
-          </a:p>
-        </p:txBody>
-      </p:sp>
-      <p:sp>
-        <p:nvSpPr>
-          <p:cNvPr id="7" name="Text 3"/>
-          <p:cNvSpPr/>
-          <p:nvPr/>
-        </p:nvSpPr>
-        <p:spPr>
-          <a:xfrm>
-            <a:off x="6812280" y="1810512"/>
-            <a:ext cx="4846320" cy="411480"/>
-          </a:xfrm>
-          <a:prstGeom prst="rect">
-            <a:avLst/>
-          </a:prstGeom>
-          <a:noFill/>
-          <a:ln/>
-        </p:spPr>
-        <p:txBody>
-          <a:bodyPr wrap="square" lIns="0" tIns="0" rIns="0" bIns="0" rtlCol="0" anchor="ctr"/>
-          <a:lstStyle/>
-          <a:p>
-            <a:pPr indent="0" marL="0">
-              <a:buNone/>
-            </a:pPr>
-            <a:r>
-              <a:rPr lang="en-US" sz="2400" b="1" dirty="0">
-                <a:solidFill>
-                  <a:srgbClr val="FFFFFF"/>
-                </a:solidFill>
-                <a:latin typeface="Arial" pitchFamily="34" charset="0"/>
-                <a:ea typeface="Arial" pitchFamily="34" charset="-122"/>
-                <a:cs typeface="Arial" pitchFamily="34" charset="-120"/>
-              </a:rPr>
-              <a:t>Ahmedabad</a:t>
-            </a:r>
-            <a:endParaRPr lang="en-US" sz="2400" dirty="0"/>
-          </a:p>
-        </p:txBody>
-      </p:sp>
-      <p:sp>
-        <p:nvSpPr>
-          <p:cNvPr id="8" name="Text 4"/>
-          <p:cNvSpPr/>
-          <p:nvPr/>
-        </p:nvSpPr>
-        <p:spPr>
-          <a:xfrm>
-            <a:off x="6812280" y="2267712"/>
-            <a:ext cx="4846320" cy="384048"/>
-          </a:xfrm>
-          <a:prstGeom prst="rect">
-            <a:avLst/>
-          </a:prstGeom>
-          <a:noFill/>
-          <a:ln/>
-        </p:spPr>
-        <p:txBody>
-          <a:bodyPr wrap="square" lIns="0" tIns="0" rIns="0" bIns="0" rtlCol="0" anchor="ctr"/>
-          <a:lstStyle/>
-          <a:p>
-            <a:pPr indent="0" marL="0">
-              <a:buNone/>
-            </a:pPr>
-            <a:r>
-              <a:rPr lang="en-US" sz="1600" b="1" dirty="0">
-                <a:solidFill>
-                  <a:srgbClr val="FFFFFF"/>
-                </a:solidFill>
-                <a:latin typeface="Arial" pitchFamily="34" charset="0"/>
-                <a:ea typeface="Arial" pitchFamily="34" charset="-122"/>
-                <a:cs typeface="Arial" pitchFamily="34" charset="-120"/>
-              </a:rPr>
-              <a:t>Thaltej Acropolis Mall Gurudwara to SG Highway</a:t>
-            </a:r>
-            <a:endParaRPr lang="en-US" sz="1600" dirty="0"/>
-          </a:p>
-        </p:txBody>
-      </p:sp>
-      <p:pic>
-        <p:nvPicPr>
-          <p:cNvPr id="9" name="Image 2" descr="preencoded.png">    </p:cNvPr>
-          <p:cNvPicPr>
-            <a:picLocks noChangeAspect="1"/>
-          </p:cNvPicPr>
-          <p:nvPr/>
-        </p:nvPicPr>
-        <p:blipFill>
-          <a:blip r:embed="rId4"/>
-          <a:stretch>
-            <a:fillRect/>
-          </a:stretch>
-        </p:blipFill>
-        <p:spPr>
-          <a:xfrm>
-            <a:off x="6812280" y="2852928"/>
-            <a:ext cx="384048" cy="384048"/>
-          </a:xfrm>
-          <a:prstGeom prst="rect">
-            <a:avLst/>
-          </a:prstGeom>
-        </p:spPr>
-      </p:pic>
-      <p:sp>
-        <p:nvSpPr>
-          <p:cNvPr id="10" name="Text 5"/>
-          <p:cNvSpPr/>
-          <p:nvPr/>
-        </p:nvSpPr>
-        <p:spPr>
-          <a:xfrm>
-            <a:off x="7424928" y="2834640"/>
-            <a:ext cx="4389120" cy="402336"/>
-          </a:xfrm>
-          <a:prstGeom prst="rect">
-            <a:avLst/>
-          </a:prstGeom>
-          <a:noFill/>
-          <a:ln/>
-        </p:spPr>
-        <p:txBody>
-          <a:bodyPr wrap="square" lIns="0" tIns="0" rIns="0" bIns="0" rtlCol="0" anchor="ctr"/>
-          <a:lstStyle/>
-          <a:p>
-            <a:pPr indent="0" marL="0">
-              <a:buNone/>
-            </a:pPr>
-            <a:r>
-              <a:rPr lang="en-US" sz="1450" b="1" dirty="0">
-                <a:solidFill>
-                  <a:srgbClr val="FFC200"/>
-                </a:solidFill>
-                <a:latin typeface="Arial" pitchFamily="34" charset="0"/>
-                <a:ea typeface="Arial" pitchFamily="34" charset="-122"/>
-                <a:cs typeface="Arial" pitchFamily="34" charset="-120"/>
-              </a:rPr>
-              <a:t>Size:  </a:t>
-            </a:r>
-            <a:pPr indent="0" marL="0">
-              <a:buNone/>
-            </a:pPr>
-            <a:r>
-              <a:rPr lang="en-US" sz="1450" b="1" dirty="0">
-                <a:solidFill>
-                  <a:srgbClr val="FFFFFF"/>
-                </a:solidFill>
-                <a:latin typeface="Arial" pitchFamily="34" charset="0"/>
-                <a:ea typeface="Arial" pitchFamily="34" charset="-122"/>
-                <a:cs typeface="Arial" pitchFamily="34" charset="-120"/>
-              </a:rPr>
-              <a:t>42x20 ft</a:t>
-            </a:r>
-            <a:endParaRPr lang="en-US" sz="1450" dirty="0"/>
-          </a:p>
-        </p:txBody>
-      </p:sp>
-      <p:sp>
-        <p:nvSpPr>
-          <p:cNvPr id="11" name="Shape 6"/>
-          <p:cNvSpPr/>
-          <p:nvPr/>
-        </p:nvSpPr>
-        <p:spPr>
-          <a:xfrm>
-            <a:off x="7424928" y="3273552"/>
-            <a:ext cx="4389120" cy="0"/>
-          </a:xfrm>
-          <a:prstGeom prst="line">
-            <a:avLst/>
-          </a:prstGeom>
-          <a:noFill/>
-          <a:ln w="10160">
-            <a:solidFill>
-              <a:srgbClr val="333333"/>
-            </a:solidFill>
-            <a:prstDash val="solid"/>
-          </a:ln>
-        </p:spPr>
-      </p:sp>
-      <p:pic>
-        <p:nvPicPr>
-          <p:cNvPr id="12" name="Image 3" descr="preencoded.png">    </p:cNvPr>
-          <p:cNvPicPr>
-            <a:picLocks noChangeAspect="1"/>
-          </p:cNvPicPr>
-          <p:nvPr/>
-        </p:nvPicPr>
-        <p:blipFill>
-          <a:blip r:embed="rId5"/>
-          <a:stretch>
-            <a:fillRect/>
-          </a:stretch>
-        </p:blipFill>
-        <p:spPr>
-          <a:xfrm>
-            <a:off x="6812280" y="3419856"/>
-            <a:ext cx="384048" cy="384048"/>
-          </a:xfrm>
-          <a:prstGeom prst="rect">
-            <a:avLst/>
-          </a:prstGeom>
-        </p:spPr>
-      </p:pic>
-      <p:sp>
-        <p:nvSpPr>
-          <p:cNvPr id="13" name="Text 7"/>
-          <p:cNvSpPr/>
-          <p:nvPr/>
-        </p:nvSpPr>
-        <p:spPr>
-          <a:xfrm>
-            <a:off x="7424928" y="3401568"/>
-            <a:ext cx="4389120" cy="402336"/>
-          </a:xfrm>
-          <a:prstGeom prst="rect">
-            <a:avLst/>
-          </a:prstGeom>
-          <a:noFill/>
-          <a:ln/>
-        </p:spPr>
-        <p:txBody>
-          <a:bodyPr wrap="square" lIns="0" tIns="0" rIns="0" bIns="0" rtlCol="0" anchor="ctr"/>
-          <a:lstStyle/>
-          <a:p>
-            <a:pPr indent="0" marL="0">
-              <a:buNone/>
-            </a:pPr>
-            <a:r>
-              <a:rPr lang="en-US" sz="1450" b="1" dirty="0">
-                <a:solidFill>
-                  <a:srgbClr val="FFC200"/>
-                </a:solidFill>
-                <a:latin typeface="Arial" pitchFamily="34" charset="0"/>
-                <a:ea typeface="Arial" pitchFamily="34" charset="-122"/>
-                <a:cs typeface="Arial" pitchFamily="34" charset="-120"/>
-              </a:rPr>
-              <a:t>Type:  </a:t>
-            </a:r>
-            <a:pPr indent="0" marL="0">
-              <a:buNone/>
-            </a:pPr>
-            <a:r>
-              <a:rPr lang="en-US" sz="1450" b="1" dirty="0">
-                <a:solidFill>
-                  <a:srgbClr val="FFFFFF"/>
-                </a:solidFill>
-                <a:latin typeface="Arial" pitchFamily="34" charset="0"/>
-                <a:ea typeface="Arial" pitchFamily="34" charset="-122"/>
-                <a:cs typeface="Arial" pitchFamily="34" charset="-120"/>
-              </a:rPr>
-              <a:t>Hoarding</a:t>
-            </a:r>
-            <a:endParaRPr lang="en-US" sz="1450" dirty="0"/>
-          </a:p>
-        </p:txBody>
-      </p:sp>
-      <p:sp>
-        <p:nvSpPr>
-          <p:cNvPr id="14" name="Shape 8"/>
-          <p:cNvSpPr/>
-          <p:nvPr/>
-        </p:nvSpPr>
-        <p:spPr>
-          <a:xfrm>
-            <a:off x="7424928" y="3840480"/>
-            <a:ext cx="4389120" cy="0"/>
-          </a:xfrm>
-          <a:prstGeom prst="line">
-            <a:avLst/>
-          </a:prstGeom>
-          <a:noFill/>
-          <a:ln w="10160">
-            <a:solidFill>
-              <a:srgbClr val="333333"/>
-            </a:solidFill>
-            <a:prstDash val="solid"/>
-          </a:ln>
-        </p:spPr>
-      </p:sp>
-      <p:pic>
-        <p:nvPicPr>
-          <p:cNvPr id="15" name="Image 4" descr="preencoded.png">    </p:cNvPr>
-          <p:cNvPicPr>
-            <a:picLocks noChangeAspect="1"/>
-          </p:cNvPicPr>
-          <p:nvPr/>
-        </p:nvPicPr>
-        <p:blipFill>
-          <a:blip r:embed="rId6"/>
-          <a:stretch>
-            <a:fillRect/>
-          </a:stretch>
-        </p:blipFill>
-        <p:spPr>
-          <a:xfrm>
-            <a:off x="6812280" y="3986784"/>
-            <a:ext cx="384048" cy="384048"/>
-          </a:xfrm>
-          <a:prstGeom prst="rect">
-            <a:avLst/>
-          </a:prstGeom>
-        </p:spPr>
-      </p:pic>
-      <p:sp>
-        <p:nvSpPr>
-          <p:cNvPr id="16" name="Text 9"/>
-          <p:cNvSpPr/>
-          <p:nvPr/>
-        </p:nvSpPr>
-        <p:spPr>
-          <a:xfrm>
-            <a:off x="7424928" y="3968496"/>
-            <a:ext cx="4389120" cy="402336"/>
-          </a:xfrm>
-          <a:prstGeom prst="rect">
-            <a:avLst/>
-          </a:prstGeom>
-          <a:noFill/>
-          <a:ln/>
-        </p:spPr>
-        <p:txBody>
-          <a:bodyPr wrap="square" lIns="0" tIns="0" rIns="0" bIns="0" rtlCol="0" anchor="ctr"/>
-          <a:lstStyle/>
-          <a:p>
-            <a:pPr indent="0" marL="0">
-              <a:buNone/>
-            </a:pPr>
-            <a:r>
-              <a:rPr lang="en-US" sz="1450" b="1" dirty="0">
-                <a:solidFill>
-                  <a:srgbClr val="FFC200"/>
-                </a:solidFill>
-                <a:latin typeface="Arial" pitchFamily="34" charset="0"/>
-                <a:ea typeface="Arial" pitchFamily="34" charset="-122"/>
-                <a:cs typeface="Arial" pitchFamily="34" charset="-120"/>
-              </a:rPr>
-              <a:t>Illumination:  </a:t>
-            </a:r>
-            <a:pPr indent="0" marL="0">
-              <a:buNone/>
-            </a:pPr>
-            <a:r>
-              <a:rPr lang="en-US" sz="1450" b="1" dirty="0">
-                <a:solidFill>
-                  <a:srgbClr val="FFFFFF"/>
-                </a:solidFill>
-                <a:latin typeface="Arial" pitchFamily="34" charset="0"/>
-                <a:ea typeface="Arial" pitchFamily="34" charset="-122"/>
-                <a:cs typeface="Arial" pitchFamily="34" charset="-120"/>
-              </a:rPr>
-              <a:t>BL</a:t>
-            </a:r>
-            <a:endParaRPr lang="en-US" sz="1450" dirty="0"/>
-          </a:p>
-        </p:txBody>
-      </p:sp>
-      <p:sp>
-        <p:nvSpPr>
-          <p:cNvPr id="17" name="Shape 10"/>
-          <p:cNvSpPr/>
-          <p:nvPr/>
-        </p:nvSpPr>
-        <p:spPr>
-          <a:xfrm>
-            <a:off x="7424928" y="4407408"/>
-            <a:ext cx="4389120" cy="0"/>
-          </a:xfrm>
-          <a:prstGeom prst="line">
-            <a:avLst/>
-          </a:prstGeom>
-          <a:noFill/>
-          <a:ln w="10160">
-            <a:solidFill>
-              <a:srgbClr val="333333"/>
-            </a:solidFill>
-            <a:prstDash val="solid"/>
-          </a:ln>
-        </p:spPr>
-      </p:sp>
-      <p:pic>
-        <p:nvPicPr>
-          <p:cNvPr id="18" name="Image 5" descr="preencoded.png">    </p:cNvPr>
-          <p:cNvPicPr>
-            <a:picLocks noChangeAspect="1"/>
-          </p:cNvPicPr>
-          <p:nvPr/>
-        </p:nvPicPr>
-        <p:blipFill>
-          <a:blip r:embed="rId7"/>
-          <a:stretch>
-            <a:fillRect/>
-          </a:stretch>
-        </p:blipFill>
-        <p:spPr>
-          <a:xfrm>
-            <a:off x="6812280" y="4553712"/>
-            <a:ext cx="384048" cy="384048"/>
-          </a:xfrm>
-          <a:prstGeom prst="rect">
-            <a:avLst/>
-          </a:prstGeom>
-        </p:spPr>
-      </p:pic>
-      <p:sp>
-        <p:nvSpPr>
-          <p:cNvPr id="19" name="Text 11"/>
-          <p:cNvSpPr/>
-          <p:nvPr/>
-        </p:nvSpPr>
-        <p:spPr>
-          <a:xfrm>
-            <a:off x="7424928" y="4535424"/>
-            <a:ext cx="4389120" cy="402336"/>
-          </a:xfrm>
-          <a:prstGeom prst="rect">
-            <a:avLst/>
-          </a:prstGeom>
-          <a:noFill/>
-          <a:ln/>
-        </p:spPr>
-        <p:txBody>
-          <a:bodyPr wrap="square" lIns="0" tIns="0" rIns="0" bIns="0" rtlCol="0" anchor="ctr"/>
-          <a:lstStyle/>
-          <a:p>
-            <a:pPr indent="0" marL="0">
-              <a:buNone/>
-            </a:pPr>
-            <a:r>
-              <a:rPr lang="en-US" sz="1450" b="1" dirty="0">
-                <a:solidFill>
-                  <a:srgbClr val="FFC200"/>
-                </a:solidFill>
-                <a:latin typeface="Arial" pitchFamily="34" charset="0"/>
-                <a:ea typeface="Arial" pitchFamily="34" charset="-122"/>
-                <a:cs typeface="Arial" pitchFamily="34" charset="-120"/>
-              </a:rPr>
-              <a:t>Adv.fee per month:  </a:t>
-            </a:r>
-            <a:pPr indent="0" marL="0">
-              <a:buNone/>
-            </a:pPr>
-            <a:r>
-              <a:rPr lang="en-US" sz="1450" b="1" dirty="0">
-                <a:solidFill>
-                  <a:srgbClr val="FFFFFF"/>
-                </a:solidFill>
-                <a:latin typeface="Arial" pitchFamily="34" charset="0"/>
-                <a:ea typeface="Arial" pitchFamily="34" charset="-122"/>
-                <a:cs typeface="Arial" pitchFamily="34" charset="-120"/>
-              </a:rPr>
-              <a:t>₹ 4,00,000/-</a:t>
-            </a:r>
-            <a:endParaRPr lang="en-US" sz="1450" dirty="0"/>
-          </a:p>
-        </p:txBody>
-      </p:sp>
-      <p:sp>
-        <p:nvSpPr>
-          <p:cNvPr id="20" name="Shape 12"/>
-          <p:cNvSpPr/>
-          <p:nvPr/>
-        </p:nvSpPr>
-        <p:spPr>
-          <a:xfrm>
-            <a:off x="7424928" y="4974336"/>
-            <a:ext cx="4389120" cy="0"/>
-          </a:xfrm>
-          <a:prstGeom prst="line">
-            <a:avLst/>
-          </a:prstGeom>
-          <a:noFill/>
-          <a:ln w="10160">
-            <a:solidFill>
-              <a:srgbClr val="333333"/>
-            </a:solidFill>
-            <a:prstDash val="solid"/>
-          </a:ln>
-        </p:spPr>
-      </p:sp>
-      <p:pic>
-        <p:nvPicPr>
-          <p:cNvPr id="21" name="Image 6" descr="preencoded.png">    </p:cNvPr>
-          <p:cNvPicPr>
-            <a:picLocks noChangeAspect="1"/>
-          </p:cNvPicPr>
-          <p:nvPr/>
-        </p:nvPicPr>
-        <p:blipFill>
-          <a:blip r:embed="rId8"/>
-          <a:stretch>
-            <a:fillRect/>
-          </a:stretch>
-        </p:blipFill>
-        <p:spPr>
-          <a:xfrm>
-            <a:off x="6812280" y="5120640"/>
-            <a:ext cx="384048" cy="384048"/>
-          </a:xfrm>
-          <a:prstGeom prst="rect">
-            <a:avLst/>
-          </a:prstGeom>
-        </p:spPr>
-      </p:pic>
-      <p:sp>
-        <p:nvSpPr>
-          <p:cNvPr id="22" name="Text 13"/>
-          <p:cNvSpPr/>
-          <p:nvPr/>
-        </p:nvSpPr>
-        <p:spPr>
-          <a:xfrm>
-            <a:off x="7424928" y="5102352"/>
-            <a:ext cx="4389120" cy="402336"/>
-          </a:xfrm>
-          <a:prstGeom prst="rect">
-            <a:avLst/>
-          </a:prstGeom>
-          <a:noFill/>
-          <a:ln/>
-        </p:spPr>
-        <p:txBody>
-          <a:bodyPr wrap="square" lIns="0" tIns="0" rIns="0" bIns="0" rtlCol="0" anchor="ctr"/>
-          <a:lstStyle/>
-          <a:p>
-            <a:pPr indent="0" marL="0">
-              <a:buNone/>
-            </a:pPr>
-            <a:r>
-              <a:rPr lang="en-US" sz="1450" b="1" dirty="0">
-                <a:solidFill>
-                  <a:srgbClr val="FFC200"/>
-                </a:solidFill>
-                <a:latin typeface="Arial" pitchFamily="34" charset="0"/>
-                <a:ea typeface="Arial" pitchFamily="34" charset="-122"/>
-                <a:cs typeface="Arial" pitchFamily="34" charset="-120"/>
-              </a:rPr>
-              <a:t>Availability:  </a:t>
-            </a:r>
-            <a:pPr indent="0" marL="0">
-              <a:buNone/>
-            </a:pPr>
-            <a:r>
-              <a:rPr lang="en-US" sz="1450" b="1" dirty="0">
-                <a:solidFill>
-                  <a:srgbClr val="FFFFFF"/>
-                </a:solidFill>
-                <a:latin typeface="Arial" pitchFamily="34" charset="0"/>
-                <a:ea typeface="Arial" pitchFamily="34" charset="-122"/>
-                <a:cs typeface="Arial" pitchFamily="34" charset="-120"/>
-              </a:rPr>
-              <a:t>Booked till 10 Nov 2026</a:t>
-            </a:r>
-            <a:endParaRPr lang="en-US" sz="1450" dirty="0"/>
-          </a:p>
-        </p:txBody>
-      </p:sp>
-      <p:sp>
-        <p:nvSpPr>
-          <p:cNvPr id="23" name="Shape 14"/>
-          <p:cNvSpPr/>
-          <p:nvPr/>
-        </p:nvSpPr>
-        <p:spPr>
-          <a:xfrm>
-            <a:off x="7424928" y="5541264"/>
-            <a:ext cx="4389120" cy="0"/>
-          </a:xfrm>
-          <a:prstGeom prst="line">
-            <a:avLst/>
-          </a:prstGeom>
-          <a:noFill/>
-          <a:ln w="10160">
-            <a:solidFill>
-              <a:srgbClr val="333333"/>
-            </a:solidFill>
-            <a:prstDash val="solid"/>
-          </a:ln>
-        </p:spPr>
-      </p:sp>
-      <p:pic>
-        <p:nvPicPr>
-          <p:cNvPr id="24" name="Image 7" descr="preencoded.png">    </p:cNvPr>
-          <p:cNvPicPr>
-            <a:picLocks noChangeAspect="1"/>
-          </p:cNvPicPr>
-          <p:nvPr/>
-        </p:nvPicPr>
-        <p:blipFill>
-          <a:blip r:embed="rId9"/>
-          <a:stretch>
-            <a:fillRect/>
-          </a:stretch>
-        </p:blipFill>
-        <p:spPr>
-          <a:xfrm>
-            <a:off x="6812280" y="5687568"/>
-            <a:ext cx="384048" cy="384048"/>
-          </a:xfrm>
-          <a:prstGeom prst="rect">
-            <a:avLst/>
-          </a:prstGeom>
-        </p:spPr>
-      </p:pic>
-      <p:sp>
-        <p:nvSpPr>
-          <p:cNvPr id="25" name="Text 15"/>
-          <p:cNvSpPr/>
-          <p:nvPr/>
-        </p:nvSpPr>
-        <p:spPr>
-          <a:xfrm>
-            <a:off x="7424928" y="5669280"/>
-            <a:ext cx="4389120" cy="402336"/>
-          </a:xfrm>
-          <a:prstGeom prst="rect">
-            <a:avLst/>
-          </a:prstGeom>
-          <a:noFill/>
-          <a:ln/>
-        </p:spPr>
-        <p:txBody>
-          <a:bodyPr wrap="square" lIns="0" tIns="0" rIns="0" bIns="0" rtlCol="0" anchor="ctr"/>
-          <a:lstStyle/>
-          <a:p>
-            <a:pPr indent="0" marL="0">
-              <a:buNone/>
-            </a:pPr>
-            <a:r>
-              <a:rPr lang="en-US" sz="1450" b="1" dirty="0">
-                <a:solidFill>
-                  <a:srgbClr val="FFC200"/>
-                </a:solidFill>
-                <a:latin typeface="Arial" pitchFamily="34" charset="0"/>
-                <a:ea typeface="Arial" pitchFamily="34" charset="-122"/>
-                <a:cs typeface="Arial" pitchFamily="34" charset="-120"/>
-              </a:rPr>
-              <a:t>Location Coordinates:  </a:t>
-            </a:r>
-            <a:pPr indent="0" marL="0">
-              <a:buNone/>
-            </a:pPr>
-            <a:r>
-              <a:rPr lang="en-US" sz="1450" b="1" dirty="0">
-                <a:solidFill>
-                  <a:srgbClr val="FFFFFF"/>
-                </a:solidFill>
-                <a:latin typeface="Arial" pitchFamily="34" charset="0"/>
-                <a:ea typeface="Arial" pitchFamily="34" charset="-122"/>
-                <a:cs typeface="Arial" pitchFamily="34" charset="-120"/>
-              </a:rPr>
-              <a:t>23.049593, 72.516808</a:t>
-            </a:r>
-            <a:endParaRPr lang="en-US" sz="1450" dirty="0"/>
-          </a:p>
-        </p:txBody>
-      </p:sp>
-    </p:spTree>
-  </p:cSld>
-  <p:clrMapOvr>
-    <a:masterClrMapping/>
-  </p:clrMapOvr>
-</p:sld>
-</file>
-
-<file path=ppt/slides/slide7.xml><?xml version="1.0" encoding="utf-8"?>
-<p:sld xmlns:a="http://schemas.openxmlformats.org/drawingml/2006/main" xmlns:r="http://schemas.openxmlformats.org/officeDocument/2006/relationships" xmlns:p="http://schemas.openxmlformats.org/presentationml/2006/main">
-  <p:cSld name="Slide 7">
-    <p:bg>
-      <p:bgPr>
-        <a:solidFill>
-          <a:srgbClr val="000000"/>
-        </a:solidFill>
-      </p:bgPr>
-    </p:bg>
-    <p:spTree>
-      <p:nvGrpSpPr>
-        <p:cNvPr id="1" name=""/>
-        <p:cNvGrpSpPr/>
-        <p:nvPr/>
-      </p:nvGrpSpPr>
-      <p:grpSpPr>
-        <a:xfrm>
-          <a:off x="0" y="0"/>
-          <a:ext cx="0" cy="0"/>
-          <a:chOff x="0" y="0"/>
-          <a:chExt cx="0" cy="0"/>
-        </a:xfrm>
-      </p:grpSpPr>
-      <p:pic>
-        <p:nvPicPr>
-          <p:cNvPr id="2" name="Image 0" descr="preencoded.png">    </p:cNvPr>
-          <p:cNvPicPr>
-            <a:picLocks noChangeAspect="1"/>
-          </p:cNvPicPr>
-          <p:nvPr/>
-        </p:nvPicPr>
-        <p:blipFill>
-          <a:blip r:embed="rId1"/>
-          <a:stretch>
-            <a:fillRect/>
-          </a:stretch>
-        </p:blipFill>
-        <p:spPr>
-          <a:xfrm>
-            <a:off x="640080" y="640080"/>
-            <a:ext cx="5715000" cy="4663440"/>
-          </a:xfrm>
-          <a:prstGeom prst="rect">
-            <a:avLst/>
-          </a:prstGeom>
-        </p:spPr>
-      </p:pic>
-      <p:pic>
-        <p:nvPicPr>
-          <p:cNvPr id="3" name="Image 1" descr="preencoded.png">    </p:cNvPr>
-          <p:cNvPicPr>
-            <a:picLocks noChangeAspect="1"/>
-          </p:cNvPicPr>
-          <p:nvPr/>
-        </p:nvPicPr>
-        <p:blipFill>
-          <a:blip r:embed="rId2"/>
-          <a:stretch>
-            <a:fillRect/>
-          </a:stretch>
-        </p:blipFill>
-        <p:spPr>
-          <a:xfrm>
-            <a:off x="640080" y="5532120"/>
-            <a:ext cx="1691640" cy="685800"/>
-          </a:xfrm>
-          <a:prstGeom prst="rect">
-            <a:avLst/>
-          </a:prstGeom>
-        </p:spPr>
-      </p:pic>
-      <p:sp>
-        <p:nvSpPr>
-          <p:cNvPr id="4" name="Text 0"/>
-          <p:cNvSpPr/>
-          <p:nvPr/>
-        </p:nvSpPr>
-        <p:spPr>
-          <a:xfrm>
-            <a:off x="6812280" y="640080"/>
-            <a:ext cx="3200400" cy="274320"/>
-          </a:xfrm>
-          <a:prstGeom prst="rect">
-            <a:avLst/>
-          </a:prstGeom>
-          <a:noFill/>
-          <a:ln/>
-        </p:spPr>
-        <p:txBody>
-          <a:bodyPr wrap="square" lIns="0" tIns="0" rIns="0" bIns="0" rtlCol="0" anchor="ctr"/>
-          <a:lstStyle/>
-          <a:p>
-            <a:pPr indent="0" marL="0">
-              <a:buNone/>
-            </a:pPr>
-            <a:r>
-              <a:rPr lang="en-US" sz="1300" dirty="0">
-                <a:solidFill>
-                  <a:srgbClr val="FFFFFF"/>
-                </a:solidFill>
-                <a:latin typeface="Arial" pitchFamily="34" charset="0"/>
-                <a:ea typeface="Arial" pitchFamily="34" charset="-122"/>
-                <a:cs typeface="Arial" pitchFamily="34" charset="-120"/>
-              </a:rPr>
-              <a:t>Site 5</a:t>
-            </a:r>
-            <a:endParaRPr lang="en-US" sz="1300" dirty="0"/>
-          </a:p>
-        </p:txBody>
-      </p:sp>
-      <p:sp>
-        <p:nvSpPr>
-          <p:cNvPr id="5" name="Shape 1"/>
-          <p:cNvSpPr/>
-          <p:nvPr/>
-        </p:nvSpPr>
-        <p:spPr>
-          <a:xfrm>
-            <a:off x="6812280" y="960120"/>
-            <a:ext cx="2423160" cy="658368"/>
-          </a:xfrm>
-          <a:prstGeom prst="roundRect">
-            <a:avLst>
-              <a:gd name="adj" fmla="val 25000"/>
-            </a:avLst>
-          </a:prstGeom>
-          <a:solidFill>
-            <a:srgbClr val="FFC200"/>
-          </a:solidFill>
-          <a:ln w="12700">
-            <a:solidFill>
-              <a:srgbClr val="FFC200"/>
-            </a:solidFill>
-            <a:prstDash val="solid"/>
-          </a:ln>
-        </p:spPr>
-      </p:sp>
-      <p:sp>
-        <p:nvSpPr>
-          <p:cNvPr id="6" name="Text 2">
-            <a:hlinkClick r:id="rId3" tooltip="Open MB-63 in Latest Booking"/>
-          </p:cNvPr>
-          <p:cNvSpPr/>
-          <p:nvPr/>
-        </p:nvSpPr>
-        <p:spPr>
-          <a:xfrm>
-            <a:off x="6812280" y="960120"/>
-            <a:ext cx="2423160" cy="658368"/>
-          </a:xfrm>
-          <a:prstGeom prst="rect">
-            <a:avLst/>
-          </a:prstGeom>
-          <a:noFill/>
-          <a:ln/>
-        </p:spPr>
-        <p:txBody>
-          <a:bodyPr wrap="square" lIns="0" tIns="0" rIns="0" bIns="0" rtlCol="0" anchor="ctr"/>
-          <a:lstStyle/>
-          <a:p>
-            <a:pPr algn="ctr" indent="0" marL="0">
-              <a:buNone/>
-            </a:pPr>
-            <a:r>
-              <a:rPr lang="en-US" sz="2600" b="1" u="sng" dirty="0">
-                <a:solidFill>
-                  <a:srgbClr val="000000"/>
-                </a:solidFill>
-                <a:latin typeface="Arial" pitchFamily="34" charset="0"/>
-                <a:ea typeface="Arial" pitchFamily="34" charset="-122"/>
-                <a:cs typeface="Arial" pitchFamily="34" charset="-120"/>
-                <a:hlinkClick r:id="rId3" invalidUrl="" action="" tgtFrame="" tooltip="Open MB-63 in Latest Booking" history="1" highlightClick="0" endSnd="0">
-                  <a:extLst>
-                    <a:ext uri="{A12FA001-AC4F-418D-AE19-62706E023703}">
-                      <ahyp:hlinkClr xmlns:ahyp="http://schemas.microsoft.com/office/drawing/2018/hyperlinkcolor" val="tx"/>
-                    </a:ext>
-                  </a:extLst>
-                </a:hlinkClick>
-              </a:rPr>
-              <a:t>MB - 63</a:t>
-            </a:r>
-            <a:endParaRPr lang="en-US" sz="2600" dirty="0"/>
-          </a:p>
-        </p:txBody>
-      </p:sp>
-      <p:sp>
-        <p:nvSpPr>
-          <p:cNvPr id="7" name="Text 3"/>
-          <p:cNvSpPr/>
-          <p:nvPr/>
-        </p:nvSpPr>
-        <p:spPr>
-          <a:xfrm>
-            <a:off x="6812280" y="1810512"/>
-            <a:ext cx="4846320" cy="411480"/>
-          </a:xfrm>
-          <a:prstGeom prst="rect">
-            <a:avLst/>
-          </a:prstGeom>
-          <a:noFill/>
-          <a:ln/>
-        </p:spPr>
-        <p:txBody>
-          <a:bodyPr wrap="square" lIns="0" tIns="0" rIns="0" bIns="0" rtlCol="0" anchor="ctr"/>
-          <a:lstStyle/>
-          <a:p>
-            <a:pPr indent="0" marL="0">
-              <a:buNone/>
-            </a:pPr>
-            <a:r>
-              <a:rPr lang="en-US" sz="2400" b="1" dirty="0">
-                <a:solidFill>
-                  <a:srgbClr val="FFFFFF"/>
-                </a:solidFill>
-                <a:latin typeface="Arial" pitchFamily="34" charset="0"/>
-                <a:ea typeface="Arial" pitchFamily="34" charset="-122"/>
-                <a:cs typeface="Arial" pitchFamily="34" charset="-120"/>
-              </a:rPr>
-              <a:t>Ahmedabad</a:t>
-            </a:r>
-            <a:endParaRPr lang="en-US" sz="2400" dirty="0"/>
-          </a:p>
-        </p:txBody>
-      </p:sp>
-      <p:sp>
-        <p:nvSpPr>
-          <p:cNvPr id="8" name="Text 4"/>
-          <p:cNvSpPr/>
-          <p:nvPr/>
-        </p:nvSpPr>
-        <p:spPr>
-          <a:xfrm>
-            <a:off x="6812280" y="2267712"/>
-            <a:ext cx="4846320" cy="384048"/>
-          </a:xfrm>
-          <a:prstGeom prst="rect">
-            <a:avLst/>
-          </a:prstGeom>
-          <a:noFill/>
-          <a:ln/>
-        </p:spPr>
-        <p:txBody>
-          <a:bodyPr wrap="square" lIns="0" tIns="0" rIns="0" bIns="0" rtlCol="0" anchor="ctr"/>
-          <a:lstStyle/>
-          <a:p>
-            <a:pPr indent="0" marL="0">
-              <a:buNone/>
-            </a:pPr>
-            <a:r>
-              <a:rPr lang="en-US" sz="1600" b="1" dirty="0">
-                <a:solidFill>
-                  <a:srgbClr val="FFFFFF"/>
-                </a:solidFill>
-                <a:latin typeface="Arial" pitchFamily="34" charset="0"/>
-                <a:ea typeface="Arial" pitchFamily="34" charset="-122"/>
-                <a:cs typeface="Arial" pitchFamily="34" charset="-120"/>
-              </a:rPr>
-              <a:t>Commerce College Road –Outside Wagh Bakri Tea Lounge</a:t>
-            </a:r>
-            <a:endParaRPr lang="en-US" sz="1600" dirty="0"/>
-          </a:p>
-        </p:txBody>
-      </p:sp>
-      <p:pic>
-        <p:nvPicPr>
-          <p:cNvPr id="9" name="Image 2" descr="preencoded.png">    </p:cNvPr>
-          <p:cNvPicPr>
-            <a:picLocks noChangeAspect="1"/>
-          </p:cNvPicPr>
-          <p:nvPr/>
-        </p:nvPicPr>
-        <p:blipFill>
-          <a:blip r:embed="rId4"/>
-          <a:stretch>
-            <a:fillRect/>
-          </a:stretch>
-        </p:blipFill>
-        <p:spPr>
-          <a:xfrm>
-            <a:off x="6812280" y="2852928"/>
-            <a:ext cx="384048" cy="384048"/>
-          </a:xfrm>
-          <a:prstGeom prst="rect">
-            <a:avLst/>
-          </a:prstGeom>
-        </p:spPr>
-      </p:pic>
-      <p:sp>
-        <p:nvSpPr>
-          <p:cNvPr id="10" name="Text 5"/>
-          <p:cNvSpPr/>
-          <p:nvPr/>
-        </p:nvSpPr>
-        <p:spPr>
-          <a:xfrm>
-            <a:off x="7424928" y="2834640"/>
-            <a:ext cx="4389120" cy="402336"/>
-          </a:xfrm>
-          <a:prstGeom prst="rect">
-            <a:avLst/>
-          </a:prstGeom>
-          <a:noFill/>
-          <a:ln/>
-        </p:spPr>
-        <p:txBody>
-          <a:bodyPr wrap="square" lIns="0" tIns="0" rIns="0" bIns="0" rtlCol="0" anchor="ctr"/>
-          <a:lstStyle/>
-          <a:p>
-            <a:pPr indent="0" marL="0">
-              <a:buNone/>
-            </a:pPr>
-            <a:r>
-              <a:rPr lang="en-US" sz="1450" b="1" dirty="0">
-                <a:solidFill>
-                  <a:srgbClr val="FFC200"/>
-                </a:solidFill>
-                <a:latin typeface="Arial" pitchFamily="34" charset="0"/>
-                <a:ea typeface="Arial" pitchFamily="34" charset="-122"/>
-                <a:cs typeface="Arial" pitchFamily="34" charset="-120"/>
-              </a:rPr>
-              <a:t>Size:  </a:t>
-            </a:r>
-            <a:pPr indent="0" marL="0">
-              <a:buNone/>
-            </a:pPr>
-            <a:r>
-              <a:rPr lang="en-US" sz="1450" b="1" dirty="0">
-                <a:solidFill>
-                  <a:srgbClr val="FFFFFF"/>
-                </a:solidFill>
-                <a:latin typeface="Arial" pitchFamily="34" charset="0"/>
-                <a:ea typeface="Arial" pitchFamily="34" charset="-122"/>
-                <a:cs typeface="Arial" pitchFamily="34" charset="-120"/>
-              </a:rPr>
-              <a:t>20x31 ft</a:t>
-            </a:r>
-            <a:endParaRPr lang="en-US" sz="1450" dirty="0"/>
-          </a:p>
-        </p:txBody>
-      </p:sp>
-      <p:sp>
-        <p:nvSpPr>
-          <p:cNvPr id="11" name="Shape 6"/>
-          <p:cNvSpPr/>
-          <p:nvPr/>
-        </p:nvSpPr>
-        <p:spPr>
-          <a:xfrm>
-            <a:off x="7424928" y="3273552"/>
-            <a:ext cx="4389120" cy="0"/>
-          </a:xfrm>
-          <a:prstGeom prst="line">
-            <a:avLst/>
-          </a:prstGeom>
-          <a:noFill/>
-          <a:ln w="10160">
-            <a:solidFill>
-              <a:srgbClr val="333333"/>
-            </a:solidFill>
-            <a:prstDash val="solid"/>
-          </a:ln>
-        </p:spPr>
-      </p:sp>
-      <p:pic>
-        <p:nvPicPr>
-          <p:cNvPr id="12" name="Image 3" descr="preencoded.png">    </p:cNvPr>
-          <p:cNvPicPr>
-            <a:picLocks noChangeAspect="1"/>
-          </p:cNvPicPr>
-          <p:nvPr/>
-        </p:nvPicPr>
-        <p:blipFill>
-          <a:blip r:embed="rId5"/>
-          <a:stretch>
-            <a:fillRect/>
-          </a:stretch>
-        </p:blipFill>
-        <p:spPr>
-          <a:xfrm>
-            <a:off x="6812280" y="3419856"/>
-            <a:ext cx="384048" cy="384048"/>
-          </a:xfrm>
-          <a:prstGeom prst="rect">
-            <a:avLst/>
-          </a:prstGeom>
-        </p:spPr>
-      </p:pic>
-      <p:sp>
-        <p:nvSpPr>
-          <p:cNvPr id="13" name="Text 7"/>
-          <p:cNvSpPr/>
-          <p:nvPr/>
-        </p:nvSpPr>
-        <p:spPr>
-          <a:xfrm>
-            <a:off x="7424928" y="3401568"/>
-            <a:ext cx="4389120" cy="402336"/>
-          </a:xfrm>
-          <a:prstGeom prst="rect">
-            <a:avLst/>
-          </a:prstGeom>
-          <a:noFill/>
-          <a:ln/>
-        </p:spPr>
-        <p:txBody>
-          <a:bodyPr wrap="square" lIns="0" tIns="0" rIns="0" bIns="0" rtlCol="0" anchor="ctr"/>
-          <a:lstStyle/>
-          <a:p>
-            <a:pPr indent="0" marL="0">
-              <a:buNone/>
-            </a:pPr>
-            <a:r>
-              <a:rPr lang="en-US" sz="1450" b="1" dirty="0">
-                <a:solidFill>
-                  <a:srgbClr val="FFC200"/>
-                </a:solidFill>
-                <a:latin typeface="Arial" pitchFamily="34" charset="0"/>
-                <a:ea typeface="Arial" pitchFamily="34" charset="-122"/>
-                <a:cs typeface="Arial" pitchFamily="34" charset="-120"/>
-              </a:rPr>
-              <a:t>Type:  </a:t>
-            </a:r>
-            <a:pPr indent="0" marL="0">
-              <a:buNone/>
-            </a:pPr>
-            <a:r>
-              <a:rPr lang="en-US" sz="1450" b="1" dirty="0">
-                <a:solidFill>
-                  <a:srgbClr val="FFFFFF"/>
-                </a:solidFill>
-                <a:latin typeface="Arial" pitchFamily="34" charset="0"/>
-                <a:ea typeface="Arial" pitchFamily="34" charset="-122"/>
-                <a:cs typeface="Arial" pitchFamily="34" charset="-120"/>
-              </a:rPr>
-              <a:t>Hoarding</a:t>
-            </a:r>
-            <a:endParaRPr lang="en-US" sz="1450" dirty="0"/>
-          </a:p>
-        </p:txBody>
-      </p:sp>
-      <p:sp>
-        <p:nvSpPr>
-          <p:cNvPr id="14" name="Shape 8"/>
-          <p:cNvSpPr/>
-          <p:nvPr/>
-        </p:nvSpPr>
-        <p:spPr>
-          <a:xfrm>
-            <a:off x="7424928" y="3840480"/>
-            <a:ext cx="4389120" cy="0"/>
-          </a:xfrm>
-          <a:prstGeom prst="line">
-            <a:avLst/>
-          </a:prstGeom>
-          <a:noFill/>
-          <a:ln w="10160">
-            <a:solidFill>
-              <a:srgbClr val="333333"/>
-            </a:solidFill>
-            <a:prstDash val="solid"/>
-          </a:ln>
-        </p:spPr>
-      </p:sp>
-      <p:pic>
-        <p:nvPicPr>
-          <p:cNvPr id="15" name="Image 4" descr="preencoded.png">    </p:cNvPr>
-          <p:cNvPicPr>
-            <a:picLocks noChangeAspect="1"/>
-          </p:cNvPicPr>
-          <p:nvPr/>
-        </p:nvPicPr>
-        <p:blipFill>
-          <a:blip r:embed="rId6"/>
-          <a:stretch>
-            <a:fillRect/>
-          </a:stretch>
-        </p:blipFill>
-        <p:spPr>
-          <a:xfrm>
-            <a:off x="6812280" y="3986784"/>
-            <a:ext cx="384048" cy="384048"/>
-          </a:xfrm>
-          <a:prstGeom prst="rect">
-            <a:avLst/>
-          </a:prstGeom>
-        </p:spPr>
-      </p:pic>
-      <p:sp>
-        <p:nvSpPr>
-          <p:cNvPr id="16" name="Text 9"/>
-          <p:cNvSpPr/>
-          <p:nvPr/>
-        </p:nvSpPr>
-        <p:spPr>
-          <a:xfrm>
-            <a:off x="7424928" y="3968496"/>
-            <a:ext cx="4389120" cy="402336"/>
-          </a:xfrm>
-          <a:prstGeom prst="rect">
-            <a:avLst/>
-          </a:prstGeom>
-          <a:noFill/>
-          <a:ln/>
-        </p:spPr>
-        <p:txBody>
-          <a:bodyPr wrap="square" lIns="0" tIns="0" rIns="0" bIns="0" rtlCol="0" anchor="ctr"/>
-          <a:lstStyle/>
-          <a:p>
-            <a:pPr indent="0" marL="0">
-              <a:buNone/>
-            </a:pPr>
-            <a:r>
-              <a:rPr lang="en-US" sz="1450" b="1" dirty="0">
-                <a:solidFill>
-                  <a:srgbClr val="FFC200"/>
-                </a:solidFill>
-                <a:latin typeface="Arial" pitchFamily="34" charset="0"/>
-                <a:ea typeface="Arial" pitchFamily="34" charset="-122"/>
-                <a:cs typeface="Arial" pitchFamily="34" charset="-120"/>
-              </a:rPr>
-              <a:t>Illumination:  </a:t>
-            </a:r>
-            <a:pPr indent="0" marL="0">
-              <a:buNone/>
-            </a:pPr>
-            <a:r>
-              <a:rPr lang="en-US" sz="1450" b="1" dirty="0">
-                <a:solidFill>
-                  <a:srgbClr val="FFFFFF"/>
-                </a:solidFill>
-                <a:latin typeface="Arial" pitchFamily="34" charset="0"/>
-                <a:ea typeface="Arial" pitchFamily="34" charset="-122"/>
-                <a:cs typeface="Arial" pitchFamily="34" charset="-120"/>
-              </a:rPr>
-              <a:t>BL</a:t>
-            </a:r>
-            <a:endParaRPr lang="en-US" sz="1450" dirty="0"/>
-          </a:p>
-        </p:txBody>
-      </p:sp>
-      <p:sp>
-        <p:nvSpPr>
-          <p:cNvPr id="17" name="Shape 10"/>
-          <p:cNvSpPr/>
-          <p:nvPr/>
-        </p:nvSpPr>
-        <p:spPr>
-          <a:xfrm>
-            <a:off x="7424928" y="4407408"/>
-            <a:ext cx="4389120" cy="0"/>
-          </a:xfrm>
-          <a:prstGeom prst="line">
-            <a:avLst/>
-          </a:prstGeom>
-          <a:noFill/>
-          <a:ln w="10160">
-            <a:solidFill>
-              <a:srgbClr val="333333"/>
-            </a:solidFill>
-            <a:prstDash val="solid"/>
-          </a:ln>
-        </p:spPr>
-      </p:sp>
-      <p:pic>
-        <p:nvPicPr>
-          <p:cNvPr id="18" name="Image 5" descr="preencoded.png">    </p:cNvPr>
-          <p:cNvPicPr>
-            <a:picLocks noChangeAspect="1"/>
-          </p:cNvPicPr>
-          <p:nvPr/>
-        </p:nvPicPr>
-        <p:blipFill>
-          <a:blip r:embed="rId7"/>
-          <a:stretch>
-            <a:fillRect/>
-          </a:stretch>
-        </p:blipFill>
-        <p:spPr>
-          <a:xfrm>
-            <a:off x="6812280" y="4553712"/>
-            <a:ext cx="384048" cy="384048"/>
-          </a:xfrm>
-          <a:prstGeom prst="rect">
-            <a:avLst/>
-          </a:prstGeom>
-        </p:spPr>
-      </p:pic>
-      <p:sp>
-        <p:nvSpPr>
-          <p:cNvPr id="19" name="Text 11"/>
-          <p:cNvSpPr/>
-          <p:nvPr/>
-        </p:nvSpPr>
-        <p:spPr>
-          <a:xfrm>
-            <a:off x="7424928" y="4535424"/>
-            <a:ext cx="4389120" cy="402336"/>
-          </a:xfrm>
-          <a:prstGeom prst="rect">
-            <a:avLst/>
-          </a:prstGeom>
-          <a:noFill/>
-          <a:ln/>
-        </p:spPr>
-        <p:txBody>
-          <a:bodyPr wrap="square" lIns="0" tIns="0" rIns="0" bIns="0" rtlCol="0" anchor="ctr"/>
-          <a:lstStyle/>
-          <a:p>
-            <a:pPr indent="0" marL="0">
-              <a:buNone/>
-            </a:pPr>
-            <a:r>
-              <a:rPr lang="en-US" sz="1450" b="1" dirty="0">
-                <a:solidFill>
-                  <a:srgbClr val="FFC200"/>
-                </a:solidFill>
-                <a:latin typeface="Arial" pitchFamily="34" charset="0"/>
-                <a:ea typeface="Arial" pitchFamily="34" charset="-122"/>
-                <a:cs typeface="Arial" pitchFamily="34" charset="-120"/>
-              </a:rPr>
-              <a:t>Adv.fee per month:  </a:t>
-            </a:r>
-            <a:pPr indent="0" marL="0">
-              <a:buNone/>
-            </a:pPr>
-            <a:r>
-              <a:rPr lang="en-US" sz="1450" b="1" dirty="0">
-                <a:solidFill>
-                  <a:srgbClr val="FFFFFF"/>
-                </a:solidFill>
-                <a:latin typeface="Arial" pitchFamily="34" charset="0"/>
-                <a:ea typeface="Arial" pitchFamily="34" charset="-122"/>
-                <a:cs typeface="Arial" pitchFamily="34" charset="-120"/>
-              </a:rPr>
-              <a:t>₹ 1,70,000/-</a:t>
-            </a:r>
-            <a:endParaRPr lang="en-US" sz="1450" dirty="0"/>
-          </a:p>
-        </p:txBody>
-      </p:sp>
-      <p:sp>
-        <p:nvSpPr>
-          <p:cNvPr id="20" name="Shape 12"/>
-          <p:cNvSpPr/>
-          <p:nvPr/>
-        </p:nvSpPr>
-        <p:spPr>
-          <a:xfrm>
-            <a:off x="7424928" y="4974336"/>
-            <a:ext cx="4389120" cy="0"/>
-          </a:xfrm>
-          <a:prstGeom prst="line">
-            <a:avLst/>
-          </a:prstGeom>
-          <a:noFill/>
-          <a:ln w="10160">
-            <a:solidFill>
-              <a:srgbClr val="333333"/>
-            </a:solidFill>
-            <a:prstDash val="solid"/>
-          </a:ln>
-        </p:spPr>
-      </p:sp>
-      <p:pic>
-        <p:nvPicPr>
-          <p:cNvPr id="21" name="Image 6" descr="preencoded.png">    </p:cNvPr>
-          <p:cNvPicPr>
-            <a:picLocks noChangeAspect="1"/>
-          </p:cNvPicPr>
-          <p:nvPr/>
-        </p:nvPicPr>
-        <p:blipFill>
-          <a:blip r:embed="rId8"/>
-          <a:stretch>
-            <a:fillRect/>
-          </a:stretch>
-        </p:blipFill>
-        <p:spPr>
-          <a:xfrm>
-            <a:off x="6812280" y="5120640"/>
-            <a:ext cx="384048" cy="384048"/>
-          </a:xfrm>
-          <a:prstGeom prst="rect">
-            <a:avLst/>
-          </a:prstGeom>
-        </p:spPr>
-      </p:pic>
-      <p:sp>
-        <p:nvSpPr>
-          <p:cNvPr id="22" name="Text 13"/>
-          <p:cNvSpPr/>
-          <p:nvPr/>
-        </p:nvSpPr>
-        <p:spPr>
-          <a:xfrm>
-            <a:off x="7424928" y="5102352"/>
-            <a:ext cx="4389120" cy="402336"/>
-          </a:xfrm>
-          <a:prstGeom prst="rect">
-            <a:avLst/>
-          </a:prstGeom>
-          <a:noFill/>
-          <a:ln/>
-        </p:spPr>
-        <p:txBody>
-          <a:bodyPr wrap="square" lIns="0" tIns="0" rIns="0" bIns="0" rtlCol="0" anchor="ctr"/>
-          <a:lstStyle/>
-          <a:p>
-            <a:pPr indent="0" marL="0">
-              <a:buNone/>
-            </a:pPr>
-            <a:r>
-              <a:rPr lang="en-US" sz="1450" b="1" dirty="0">
-                <a:solidFill>
-                  <a:srgbClr val="FFC200"/>
-                </a:solidFill>
-                <a:latin typeface="Arial" pitchFamily="34" charset="0"/>
-                <a:ea typeface="Arial" pitchFamily="34" charset="-122"/>
-                <a:cs typeface="Arial" pitchFamily="34" charset="-120"/>
-              </a:rPr>
-              <a:t>Availability:  </a:t>
-            </a:r>
-            <a:pPr indent="0" marL="0">
-              <a:buNone/>
-            </a:pPr>
-            <a:r>
-              <a:rPr lang="en-US" sz="1450" b="1" dirty="0">
-                <a:solidFill>
-                  <a:srgbClr val="FFFFFF"/>
-                </a:solidFill>
-                <a:latin typeface="Arial" pitchFamily="34" charset="0"/>
-                <a:ea typeface="Arial" pitchFamily="34" charset="-122"/>
-                <a:cs typeface="Arial" pitchFamily="34" charset="-120"/>
-              </a:rPr>
-              <a:t>Booked till 01 Nov 2026</a:t>
-            </a:r>
-            <a:endParaRPr lang="en-US" sz="1450" dirty="0"/>
-          </a:p>
-        </p:txBody>
-      </p:sp>
-      <p:sp>
-        <p:nvSpPr>
-          <p:cNvPr id="23" name="Shape 14"/>
-          <p:cNvSpPr/>
-          <p:nvPr/>
-        </p:nvSpPr>
-        <p:spPr>
-          <a:xfrm>
-            <a:off x="7424928" y="5541264"/>
-            <a:ext cx="4389120" cy="0"/>
-          </a:xfrm>
-          <a:prstGeom prst="line">
-            <a:avLst/>
-          </a:prstGeom>
-          <a:noFill/>
-          <a:ln w="10160">
-            <a:solidFill>
-              <a:srgbClr val="333333"/>
-            </a:solidFill>
-            <a:prstDash val="solid"/>
-          </a:ln>
-        </p:spPr>
-      </p:sp>
-      <p:pic>
-        <p:nvPicPr>
-          <p:cNvPr id="24" name="Image 7" descr="preencoded.png">    </p:cNvPr>
-          <p:cNvPicPr>
-            <a:picLocks noChangeAspect="1"/>
-          </p:cNvPicPr>
-          <p:nvPr/>
-        </p:nvPicPr>
-        <p:blipFill>
-          <a:blip r:embed="rId9"/>
-          <a:stretch>
-            <a:fillRect/>
-          </a:stretch>
-        </p:blipFill>
-        <p:spPr>
-          <a:xfrm>
-            <a:off x="6812280" y="5687568"/>
-            <a:ext cx="384048" cy="384048"/>
-          </a:xfrm>
-          <a:prstGeom prst="rect">
-            <a:avLst/>
-          </a:prstGeom>
-        </p:spPr>
-      </p:pic>
-      <p:sp>
-        <p:nvSpPr>
-          <p:cNvPr id="25" name="Text 15"/>
-          <p:cNvSpPr/>
-          <p:nvPr/>
-        </p:nvSpPr>
-        <p:spPr>
-          <a:xfrm>
-            <a:off x="7424928" y="5669280"/>
-            <a:ext cx="4389120" cy="402336"/>
-          </a:xfrm>
-          <a:prstGeom prst="rect">
-            <a:avLst/>
-          </a:prstGeom>
-          <a:noFill/>
-          <a:ln/>
-        </p:spPr>
-        <p:txBody>
-          <a:bodyPr wrap="square" lIns="0" tIns="0" rIns="0" bIns="0" rtlCol="0" anchor="ctr"/>
-          <a:lstStyle/>
-          <a:p>
-            <a:pPr indent="0" marL="0">
-              <a:buNone/>
-            </a:pPr>
-            <a:r>
-              <a:rPr lang="en-US" sz="1450" b="1" dirty="0">
-                <a:solidFill>
-                  <a:srgbClr val="FFC200"/>
-                </a:solidFill>
-                <a:latin typeface="Arial" pitchFamily="34" charset="0"/>
-                <a:ea typeface="Arial" pitchFamily="34" charset="-122"/>
-                <a:cs typeface="Arial" pitchFamily="34" charset="-120"/>
-              </a:rPr>
-              <a:t>Location Coordinates:  </a:t>
-            </a:r>
-            <a:pPr indent="0" marL="0">
-              <a:buNone/>
-            </a:pPr>
-            <a:r>
-              <a:rPr lang="en-US" sz="1450" b="1" dirty="0">
-                <a:solidFill>
-                  <a:srgbClr val="FFFFFF"/>
-                </a:solidFill>
-                <a:latin typeface="Arial" pitchFamily="34" charset="0"/>
-                <a:ea typeface="Arial" pitchFamily="34" charset="-122"/>
-                <a:cs typeface="Arial" pitchFamily="34" charset="-120"/>
-              </a:rPr>
-              <a:t>23.033581, 72.555121</a:t>
-            </a:r>
-            <a:endParaRPr lang="en-US" sz="1450" dirty="0"/>
-          </a:p>
-        </p:txBody>
-      </p:sp>
-    </p:spTree>
-  </p:cSld>
-  <p:clrMapOvr>
-    <a:masterClrMapping/>
-  </p:clrMapOvr>
-</p:sld>
-</file>
-
-<file path=ppt/slides/slide8.xml><?xml version="1.0" encoding="utf-8"?>
-<p:sld xmlns:a="http://schemas.openxmlformats.org/drawingml/2006/main" xmlns:r="http://schemas.openxmlformats.org/officeDocument/2006/relationships" xmlns:p="http://schemas.openxmlformats.org/presentationml/2006/main">
-  <p:cSld name="Slide 8">
     <p:bg>
       <p:bgPr>
         <a:solidFill>

--- a/server/templates/Testing 24-10-2026.pptx
+++ b/server/templates/Testing 24-10-2026.pptx
@@ -8,7 +8,6 @@
     <p:sldId id="256" r:id="rId2"/>
     <p:sldId id="257" r:id="rId3"/>
     <p:sldId id="258" r:id="rId4"/>
-    <p:sldId id="259" r:id="rId5"/>
     <p:sldId id="260" r:id="rId6"/>
   </p:sldIdLst>
   <p:notesMasterIdLst>
@@ -706,94 +705,6 @@
             <a:fld id="{F7021451-1387-4CA6-816F-3879F97B5CBC}" type="slidenum">
               <a:rPr lang="en-US"/>
               <a:t>3</a:t>
-            </a:fld>
-            <a:endParaRPr lang="en-US"/>
-          </a:p>
-        </p:txBody>
-      </p:sp>
-    </p:spTree>
-    <p:extLst>
-      <p:ext uri="{BB962C8B-B14F-4D97-AF65-F5344CB8AC3E}">
-        <p14:creationId xmlns:p14="http://schemas.microsoft.com/office/powerpoint/2010/main" val="1024086991"/>
-      </p:ext>
-    </p:extLst>
-  </p:cSld>
-  <p:clrMapOvr>
-    <a:masterClrMapping/>
-  </p:clrMapOvr>
-</p:notes>
-</file>
-
-<file path=ppt/notesSlides/notesSlide4.xml><?xml version="1.0" encoding="utf-8"?>
-<p:notes xmlns:a="http://schemas.openxmlformats.org/drawingml/2006/main" xmlns:r="http://schemas.openxmlformats.org/officeDocument/2006/relationships" xmlns:p="http://schemas.openxmlformats.org/presentationml/2006/main">
-  <p:cSld>
-    <p:spTree>
-      <p:nvGrpSpPr>
-        <p:cNvPr id="1" name=""/>
-        <p:cNvGrpSpPr/>
-        <p:nvPr/>
-      </p:nvGrpSpPr>
-      <p:grpSpPr>
-        <a:xfrm>
-          <a:off x="0" y="0"/>
-          <a:ext cx="0" cy="0"/>
-          <a:chOff x="0" y="0"/>
-          <a:chExt cx="0" cy="0"/>
-        </a:xfrm>
-      </p:grpSpPr>
-      <p:sp>
-        <p:nvSpPr>
-          <p:cNvPr id="2" name="Slide Image Placeholder 1"/>
-          <p:cNvSpPr>
-            <a:spLocks noGrp="1" noRot="1" noChangeAspect="1"/>
-          </p:cNvSpPr>
-          <p:nvPr>
-            <p:ph type="sldImg"/>
-          </p:nvPr>
-        </p:nvSpPr>
-        <p:spPr/>
-      </p:sp>
-      <p:sp>
-        <p:nvSpPr>
-          <p:cNvPr id="3" name="Notes Placeholder 2"/>
-          <p:cNvSpPr>
-            <a:spLocks noGrp="1"/>
-          </p:cNvSpPr>
-          <p:nvPr>
-            <p:ph type="body" idx="1"/>
-          </p:nvPr>
-        </p:nvSpPr>
-        <p:spPr/>
-        <p:txBody>
-          <a:bodyPr/>
-          <a:lstStyle/>
-          <a:p>
-            <a:r>
-              <a:rPr lang="en-US" dirty="0"/>
-              <a:t/>
-            </a:r>
-            <a:endParaRPr lang="en-US" dirty="0"/>
-          </a:p>
-        </p:txBody>
-      </p:sp>
-      <p:sp>
-        <p:nvSpPr>
-          <p:cNvPr id="4" name="Slide Number Placeholder 3"/>
-          <p:cNvSpPr>
-            <a:spLocks noGrp="1"/>
-          </p:cNvSpPr>
-          <p:nvPr>
-            <p:ph type="sldNum" sz="quarter" idx="10"/>
-          </p:nvPr>
-        </p:nvSpPr>
-        <p:spPr/>
-        <p:txBody>
-          <a:bodyPr/>
-          <a:lstStyle/>
-          <a:p>
-            <a:fld id="{F7021451-1387-4CA6-816F-3879F97B5CBC}" type="slidenum">
-              <a:rPr lang="en-US"/>
-              <a:t>4</a:t>
             </a:fld>
             <a:endParaRPr lang="en-US"/>
           </a:p>
@@ -2168,897 +2079,6 @@
 </p:sld>
 </file>
 
-<file path=ppt/slides/slide4.xml><?xml version="1.0" encoding="utf-8"?>
-<p:sld xmlns:a="http://schemas.openxmlformats.org/drawingml/2006/main" xmlns:r="http://schemas.openxmlformats.org/officeDocument/2006/relationships" xmlns:p="http://schemas.openxmlformats.org/presentationml/2006/main">
-  <p:cSld name="Slide 4">
-    <p:bg>
-      <p:bgPr>
-        <a:solidFill>
-          <a:srgbClr val="000000"/>
-        </a:solidFill>
-      </p:bgPr>
-    </p:bg>
-    <p:spTree>
-      <p:nvGrpSpPr>
-        <p:cNvPr id="1" name=""/>
-        <p:cNvGrpSpPr/>
-        <p:nvPr/>
-      </p:nvGrpSpPr>
-      <p:grpSpPr>
-        <a:xfrm>
-          <a:off x="0" y="0"/>
-          <a:ext cx="0" cy="0"/>
-          <a:chOff x="0" y="0"/>
-          <a:chExt cx="0" cy="0"/>
-        </a:xfrm>
-      </p:grpSpPr>
-      <p:sp>
-        <p:nvSpPr>
-          <p:cNvPr id="2" name="Shape 0"/>
-          <p:cNvSpPr/>
-          <p:nvPr/>
-        </p:nvSpPr>
-        <p:spPr>
-          <a:xfrm>
-            <a:off x="640080" y="640080"/>
-            <a:ext cx="5715000" cy="4663440"/>
-          </a:xfrm>
-          <a:prstGeom prst="roundRect">
-            <a:avLst>
-              <a:gd name="adj" fmla="val 2353"/>
-            </a:avLst>
-          </a:prstGeom>
-          <a:solidFill>
-            <a:srgbClr val="111111"/>
-          </a:solidFill>
-          <a:ln w="19050">
-            <a:solidFill>
-              <a:srgbClr val="2A2A2A"/>
-            </a:solidFill>
-            <a:prstDash val="solid"/>
-          </a:ln>
-        </p:spPr>
-      </p:sp>
-      <p:sp>
-        <p:nvSpPr>
-          <p:cNvPr id="3" name="Text 1"/>
-          <p:cNvSpPr/>
-          <p:nvPr/>
-        </p:nvSpPr>
-        <p:spPr>
-          <a:xfrm>
-            <a:off x="777240" y="2743200"/>
-            <a:ext cx="5440680" cy="548640"/>
-          </a:xfrm>
-          <a:prstGeom prst="rect">
-            <a:avLst/>
-          </a:prstGeom>
-          <a:noFill/>
-          <a:ln/>
-        </p:spPr>
-        <p:txBody>
-          <a:bodyPr wrap="square" rtlCol="0" anchor="ctr"/>
-          <a:lstStyle/>
-          <a:p>
-            <a:pPr algn="ctr" indent="0" marL="0">
-              <a:buNone/>
-            </a:pPr>
-            <a:r>
-              <a:rPr lang="en-US" sz="1800" b="1" dirty="0">
-                <a:solidFill>
-                  <a:srgbClr val="555555"/>
-                </a:solidFill>
-                <a:latin typeface="Arial" pitchFamily="34" charset="0"/>
-                <a:ea typeface="Arial" pitchFamily="34" charset="-122"/>
-                <a:cs typeface="Arial" pitchFamily="34" charset="-120"/>
-              </a:rPr>
-              <a:t>NO SITE PHOTO UPLOADED</a:t>
-            </a:r>
-            <a:endParaRPr lang="en-US" sz="1800" dirty="0"/>
-          </a:p>
-        </p:txBody>
-      </p:sp>
-      <p:pic>
-        <p:nvPicPr>
-          <p:cNvPr id="4" name="Image 0" descr="preencoded.png">    </p:cNvPr>
-          <p:cNvPicPr>
-            <a:picLocks noChangeAspect="1"/>
-          </p:cNvPicPr>
-          <p:nvPr/>
-        </p:nvPicPr>
-        <p:blipFill>
-          <a:blip r:embed="rId1"/>
-          <a:stretch>
-            <a:fillRect/>
-          </a:stretch>
-        </p:blipFill>
-        <p:spPr>
-          <a:xfrm>
-            <a:off x="640080" y="5532120"/>
-            <a:ext cx="1691640" cy="685800"/>
-          </a:xfrm>
-          <a:prstGeom prst="rect">
-            <a:avLst/>
-          </a:prstGeom>
-        </p:spPr>
-      </p:pic>
-      <p:sp>
-        <p:nvSpPr>
-          <p:cNvPr id="5" name="Text 2"/>
-          <p:cNvSpPr/>
-          <p:nvPr/>
-        </p:nvSpPr>
-        <p:spPr>
-          <a:xfrm>
-            <a:off x="6812280" y="640080"/>
-            <a:ext cx="3200400" cy="274320"/>
-          </a:xfrm>
-          <a:prstGeom prst="rect">
-            <a:avLst/>
-          </a:prstGeom>
-          <a:noFill/>
-          <a:ln/>
-        </p:spPr>
-        <p:txBody>
-          <a:bodyPr wrap="square" lIns="0" tIns="0" rIns="0" bIns="0" rtlCol="0" anchor="ctr"/>
-          <a:lstStyle/>
-          <a:p>
-            <a:pPr indent="0" marL="0">
-              <a:buNone/>
-            </a:pPr>
-            <a:r>
-              <a:rPr lang="en-US" sz="1300" dirty="0">
-                <a:solidFill>
-                  <a:srgbClr val="FFFFFF"/>
-                </a:solidFill>
-                <a:latin typeface="Arial" pitchFamily="34" charset="0"/>
-                <a:ea typeface="Arial" pitchFamily="34" charset="-122"/>
-                <a:cs typeface="Arial" pitchFamily="34" charset="-120"/>
-              </a:rPr>
-              <a:t>Site 2</a:t>
-            </a:r>
-            <a:endParaRPr lang="en-US" sz="1300" dirty="0"/>
-          </a:p>
-        </p:txBody>
-      </p:sp>
-      <p:sp>
-        <p:nvSpPr>
-          <p:cNvPr id="6" name="Shape 3"/>
-          <p:cNvSpPr/>
-          <p:nvPr/>
-        </p:nvSpPr>
-        <p:spPr>
-          <a:xfrm>
-            <a:off x="6812280" y="960120"/>
-            <a:ext cx="2423160" cy="658368"/>
-          </a:xfrm>
-          <a:prstGeom prst="roundRect">
-            <a:avLst>
-              <a:gd name="adj" fmla="val 25000"/>
-            </a:avLst>
-          </a:prstGeom>
-          <a:solidFill>
-            <a:srgbClr val="FFC200"/>
-          </a:solidFill>
-          <a:ln w="12700">
-            <a:solidFill>
-              <a:srgbClr val="FFC200"/>
-            </a:solidFill>
-            <a:prstDash val="solid"/>
-          </a:ln>
-        </p:spPr>
-      </p:sp>
-      <p:sp>
-        <p:nvSpPr>
-          <p:cNvPr id="7" name="Text 4">
-            <a:hlinkClick r:id="rId2" tooltip="Open SSV-07 in Latest Booking"/>
-          </p:cNvPr>
-          <p:cNvSpPr/>
-          <p:nvPr/>
-        </p:nvSpPr>
-        <p:spPr>
-          <a:xfrm>
-            <a:off x="6812280" y="960120"/>
-            <a:ext cx="2423160" cy="658368"/>
-          </a:xfrm>
-          <a:prstGeom prst="rect">
-            <a:avLst/>
-          </a:prstGeom>
-          <a:noFill/>
-          <a:ln/>
-        </p:spPr>
-        <p:txBody>
-          <a:bodyPr wrap="square" lIns="0" tIns="0" rIns="0" bIns="0" rtlCol="0" anchor="ctr"/>
-          <a:lstStyle/>
-          <a:p>
-            <a:pPr algn="ctr" indent="0" marL="0">
-              <a:buNone/>
-            </a:pPr>
-            <a:r>
-              <a:rPr lang="en-US" sz="2600" b="1" u="sng" dirty="0">
-                <a:solidFill>
-                  <a:srgbClr val="000000"/>
-                </a:solidFill>
-                <a:latin typeface="Arial" pitchFamily="34" charset="0"/>
-                <a:ea typeface="Arial" pitchFamily="34" charset="-122"/>
-                <a:cs typeface="Arial" pitchFamily="34" charset="-120"/>
-                <a:hlinkClick r:id="rId2" invalidUrl="" action="" tgtFrame="" tooltip="Open SSV-07 in Latest Booking" history="1" highlightClick="0" endSnd="0">
-                  <a:extLst>
-                    <a:ext uri="{A12FA001-AC4F-418D-AE19-62706E023703}">
-                      <ahyp:hlinkClr xmlns:ahyp="http://schemas.microsoft.com/office/drawing/2018/hyperlinkcolor" val="tx"/>
-                    </a:ext>
-                  </a:extLst>
-                </a:hlinkClick>
-              </a:rPr>
-              <a:t>SSV - 07</a:t>
-            </a:r>
-            <a:endParaRPr lang="en-US" sz="2600" dirty="0"/>
-          </a:p>
-        </p:txBody>
-      </p:sp>
-      <p:sp>
-        <p:nvSpPr>
-          <p:cNvPr id="8" name="Text 5"/>
-          <p:cNvSpPr/>
-          <p:nvPr/>
-        </p:nvSpPr>
-        <p:spPr>
-          <a:xfrm>
-            <a:off x="6812280" y="1810512"/>
-            <a:ext cx="4846320" cy="411480"/>
-          </a:xfrm>
-          <a:prstGeom prst="rect">
-            <a:avLst/>
-          </a:prstGeom>
-          <a:noFill/>
-          <a:ln/>
-        </p:spPr>
-        <p:txBody>
-          <a:bodyPr wrap="square" lIns="0" tIns="0" rIns="0" bIns="0" rtlCol="0" anchor="ctr"/>
-          <a:lstStyle/>
-          <a:p>
-            <a:pPr indent="0" marL="0">
-              <a:buNone/>
-            </a:pPr>
-            <a:r>
-              <a:rPr lang="en-US" sz="2400" b="1" dirty="0">
-                <a:solidFill>
-                  <a:srgbClr val="FFFFFF"/>
-                </a:solidFill>
-                <a:latin typeface="Arial" pitchFamily="34" charset="0"/>
-                <a:ea typeface="Arial" pitchFamily="34" charset="-122"/>
-                <a:cs typeface="Arial" pitchFamily="34" charset="-120"/>
-              </a:rPr>
-              <a:t>Ahmedabad</a:t>
-            </a:r>
-            <a:endParaRPr lang="en-US" sz="2400" dirty="0"/>
-          </a:p>
-        </p:txBody>
-      </p:sp>
-      <p:sp>
-        <p:nvSpPr>
-          <p:cNvPr id="9" name="Text 6"/>
-          <p:cNvSpPr/>
-          <p:nvPr/>
-        </p:nvSpPr>
-        <p:spPr>
-          <a:xfrm>
-            <a:off x="6812280" y="2267712"/>
-            <a:ext cx="4846320" cy="384048"/>
-          </a:xfrm>
-          <a:prstGeom prst="rect">
-            <a:avLst/>
-          </a:prstGeom>
-          <a:noFill/>
-          <a:ln/>
-        </p:spPr>
-        <p:txBody>
-          <a:bodyPr wrap="square" lIns="0" tIns="0" rIns="0" bIns="0" rtlCol="0" anchor="ctr"/>
-          <a:lstStyle/>
-          <a:p>
-            <a:pPr indent="0" marL="0">
-              <a:buNone/>
-            </a:pPr>
-            <a:r>
-              <a:rPr lang="en-US" sz="1600" b="1" dirty="0">
-                <a:solidFill>
-                  <a:srgbClr val="FFFFFF"/>
-                </a:solidFill>
-                <a:latin typeface="Arial" pitchFamily="34" charset="0"/>
-                <a:ea typeface="Arial" pitchFamily="34" charset="-122"/>
-                <a:cs typeface="Arial" pitchFamily="34" charset="-120"/>
-              </a:rPr>
-              <a:t>Naroda, Krishnanagar Police Station, Opp. Jain Templ</a:t>
-            </a:r>
-            <a:endParaRPr lang="en-US" sz="1600" dirty="0"/>
-          </a:p>
-        </p:txBody>
-      </p:sp>
-      <p:pic>
-        <p:nvPicPr>
-          <p:cNvPr id="10" name="Image 1" descr="preencoded.png">    </p:cNvPr>
-          <p:cNvPicPr>
-            <a:picLocks noChangeAspect="1"/>
-          </p:cNvPicPr>
-          <p:nvPr/>
-        </p:nvPicPr>
-        <p:blipFill>
-          <a:blip r:embed="rId3"/>
-          <a:stretch>
-            <a:fillRect/>
-          </a:stretch>
-        </p:blipFill>
-        <p:spPr>
-          <a:xfrm>
-            <a:off x="6812280" y="2852928"/>
-            <a:ext cx="384048" cy="384048"/>
-          </a:xfrm>
-          <a:prstGeom prst="rect">
-            <a:avLst/>
-          </a:prstGeom>
-        </p:spPr>
-      </p:pic>
-      <p:sp>
-        <p:nvSpPr>
-          <p:cNvPr id="11" name="Text 7"/>
-          <p:cNvSpPr/>
-          <p:nvPr/>
-        </p:nvSpPr>
-        <p:spPr>
-          <a:xfrm>
-            <a:off x="7424928" y="2834640"/>
-            <a:ext cx="4389120" cy="402336"/>
-          </a:xfrm>
-          <a:prstGeom prst="rect">
-            <a:avLst/>
-          </a:prstGeom>
-          <a:noFill/>
-          <a:ln/>
-        </p:spPr>
-        <p:txBody>
-          <a:bodyPr wrap="square" lIns="0" tIns="0" rIns="0" bIns="0" rtlCol="0" anchor="ctr"/>
-          <a:lstStyle/>
-          <a:p>
-            <a:pPr indent="0" marL="0">
-              <a:buNone/>
-            </a:pPr>
-            <a:r>
-              <a:rPr lang="en-US" sz="1450" b="1" dirty="0">
-                <a:solidFill>
-                  <a:srgbClr val="FFC200"/>
-                </a:solidFill>
-                <a:latin typeface="Arial" pitchFamily="34" charset="0"/>
-                <a:ea typeface="Arial" pitchFamily="34" charset="-122"/>
-                <a:cs typeface="Arial" pitchFamily="34" charset="-120"/>
-              </a:rPr>
-              <a:t>Size:  </a:t>
-            </a:r>
-            <a:pPr indent="0" marL="0">
-              <a:buNone/>
-            </a:pPr>
-            <a:r>
-              <a:rPr lang="en-US" sz="1450" b="1" dirty="0">
-                <a:solidFill>
-                  <a:srgbClr val="FFFFFF"/>
-                </a:solidFill>
-                <a:latin typeface="Arial" pitchFamily="34" charset="0"/>
-                <a:ea typeface="Arial" pitchFamily="34" charset="-122"/>
-                <a:cs typeface="Arial" pitchFamily="34" charset="-120"/>
-              </a:rPr>
-              <a:t>20x10 ft</a:t>
-            </a:r>
-            <a:endParaRPr lang="en-US" sz="1450" dirty="0"/>
-          </a:p>
-        </p:txBody>
-      </p:sp>
-      <p:sp>
-        <p:nvSpPr>
-          <p:cNvPr id="12" name="Shape 8"/>
-          <p:cNvSpPr/>
-          <p:nvPr/>
-        </p:nvSpPr>
-        <p:spPr>
-          <a:xfrm>
-            <a:off x="7424928" y="3273552"/>
-            <a:ext cx="4389120" cy="0"/>
-          </a:xfrm>
-          <a:prstGeom prst="line">
-            <a:avLst/>
-          </a:prstGeom>
-          <a:noFill/>
-          <a:ln w="10160">
-            <a:solidFill>
-              <a:srgbClr val="333333"/>
-            </a:solidFill>
-            <a:prstDash val="solid"/>
-          </a:ln>
-        </p:spPr>
-      </p:sp>
-      <p:pic>
-        <p:nvPicPr>
-          <p:cNvPr id="13" name="Image 2" descr="preencoded.png">    </p:cNvPr>
-          <p:cNvPicPr>
-            <a:picLocks noChangeAspect="1"/>
-          </p:cNvPicPr>
-          <p:nvPr/>
-        </p:nvPicPr>
-        <p:blipFill>
-          <a:blip r:embed="rId4"/>
-          <a:stretch>
-            <a:fillRect/>
-          </a:stretch>
-        </p:blipFill>
-        <p:spPr>
-          <a:xfrm>
-            <a:off x="6812280" y="3419856"/>
-            <a:ext cx="384048" cy="384048"/>
-          </a:xfrm>
-          <a:prstGeom prst="rect">
-            <a:avLst/>
-          </a:prstGeom>
-        </p:spPr>
-      </p:pic>
-      <p:sp>
-        <p:nvSpPr>
-          <p:cNvPr id="14" name="Text 9"/>
-          <p:cNvSpPr/>
-          <p:nvPr/>
-        </p:nvSpPr>
-        <p:spPr>
-          <a:xfrm>
-            <a:off x="7424928" y="3401568"/>
-            <a:ext cx="4389120" cy="402336"/>
-          </a:xfrm>
-          <a:prstGeom prst="rect">
-            <a:avLst/>
-          </a:prstGeom>
-          <a:noFill/>
-          <a:ln/>
-        </p:spPr>
-        <p:txBody>
-          <a:bodyPr wrap="square" lIns="0" tIns="0" rIns="0" bIns="0" rtlCol="0" anchor="ctr"/>
-          <a:lstStyle/>
-          <a:p>
-            <a:pPr indent="0" marL="0">
-              <a:buNone/>
-            </a:pPr>
-            <a:r>
-              <a:rPr lang="en-US" sz="1450" b="1" dirty="0">
-                <a:solidFill>
-                  <a:srgbClr val="FFC200"/>
-                </a:solidFill>
-                <a:latin typeface="Arial" pitchFamily="34" charset="0"/>
-                <a:ea typeface="Arial" pitchFamily="34" charset="-122"/>
-                <a:cs typeface="Arial" pitchFamily="34" charset="-120"/>
-              </a:rPr>
-              <a:t>Type:  </a:t>
-            </a:r>
-            <a:pPr indent="0" marL="0">
-              <a:buNone/>
-            </a:pPr>
-            <a:r>
-              <a:rPr lang="en-US" sz="1450" b="1" dirty="0">
-                <a:solidFill>
-                  <a:srgbClr val="FFFFFF"/>
-                </a:solidFill>
-                <a:latin typeface="Arial" pitchFamily="34" charset="0"/>
-                <a:ea typeface="Arial" pitchFamily="34" charset="-122"/>
-                <a:cs typeface="Arial" pitchFamily="34" charset="-120"/>
-              </a:rPr>
-              <a:t>Unipole</a:t>
-            </a:r>
-            <a:endParaRPr lang="en-US" sz="1450" dirty="0"/>
-          </a:p>
-        </p:txBody>
-      </p:sp>
-      <p:sp>
-        <p:nvSpPr>
-          <p:cNvPr id="15" name="Shape 10"/>
-          <p:cNvSpPr/>
-          <p:nvPr/>
-        </p:nvSpPr>
-        <p:spPr>
-          <a:xfrm>
-            <a:off x="7424928" y="3840480"/>
-            <a:ext cx="4389120" cy="0"/>
-          </a:xfrm>
-          <a:prstGeom prst="line">
-            <a:avLst/>
-          </a:prstGeom>
-          <a:noFill/>
-          <a:ln w="10160">
-            <a:solidFill>
-              <a:srgbClr val="333333"/>
-            </a:solidFill>
-            <a:prstDash val="solid"/>
-          </a:ln>
-        </p:spPr>
-      </p:sp>
-      <p:pic>
-        <p:nvPicPr>
-          <p:cNvPr id="16" name="Image 3" descr="preencoded.png">    </p:cNvPr>
-          <p:cNvPicPr>
-            <a:picLocks noChangeAspect="1"/>
-          </p:cNvPicPr>
-          <p:nvPr/>
-        </p:nvPicPr>
-        <p:blipFill>
-          <a:blip r:embed="rId5"/>
-          <a:stretch>
-            <a:fillRect/>
-          </a:stretch>
-        </p:blipFill>
-        <p:spPr>
-          <a:xfrm>
-            <a:off x="6812280" y="3986784"/>
-            <a:ext cx="384048" cy="384048"/>
-          </a:xfrm>
-          <a:prstGeom prst="rect">
-            <a:avLst/>
-          </a:prstGeom>
-        </p:spPr>
-      </p:pic>
-      <p:sp>
-        <p:nvSpPr>
-          <p:cNvPr id="17" name="Text 11"/>
-          <p:cNvSpPr/>
-          <p:nvPr/>
-        </p:nvSpPr>
-        <p:spPr>
-          <a:xfrm>
-            <a:off x="7424928" y="3968496"/>
-            <a:ext cx="4389120" cy="402336"/>
-          </a:xfrm>
-          <a:prstGeom prst="rect">
-            <a:avLst/>
-          </a:prstGeom>
-          <a:noFill/>
-          <a:ln/>
-        </p:spPr>
-        <p:txBody>
-          <a:bodyPr wrap="square" lIns="0" tIns="0" rIns="0" bIns="0" rtlCol="0" anchor="ctr"/>
-          <a:lstStyle/>
-          <a:p>
-            <a:pPr indent="0" marL="0">
-              <a:buNone/>
-            </a:pPr>
-            <a:r>
-              <a:rPr lang="en-US" sz="1450" b="1" dirty="0">
-                <a:solidFill>
-                  <a:srgbClr val="FFC200"/>
-                </a:solidFill>
-                <a:latin typeface="Arial" pitchFamily="34" charset="0"/>
-                <a:ea typeface="Arial" pitchFamily="34" charset="-122"/>
-                <a:cs typeface="Arial" pitchFamily="34" charset="-120"/>
-              </a:rPr>
-              <a:t>Illumination:  </a:t>
-            </a:r>
-            <a:pPr indent="0" marL="0">
-              <a:buNone/>
-            </a:pPr>
-            <a:r>
-              <a:rPr lang="en-US" sz="1450" b="1" dirty="0">
-                <a:solidFill>
-                  <a:srgbClr val="FFFFFF"/>
-                </a:solidFill>
-                <a:latin typeface="Arial" pitchFamily="34" charset="0"/>
-                <a:ea typeface="Arial" pitchFamily="34" charset="-122"/>
-                <a:cs typeface="Arial" pitchFamily="34" charset="-120"/>
-              </a:rPr>
-              <a:t>BL</a:t>
-            </a:r>
-            <a:endParaRPr lang="en-US" sz="1450" dirty="0"/>
-          </a:p>
-        </p:txBody>
-      </p:sp>
-      <p:sp>
-        <p:nvSpPr>
-          <p:cNvPr id="18" name="Shape 12"/>
-          <p:cNvSpPr/>
-          <p:nvPr/>
-        </p:nvSpPr>
-        <p:spPr>
-          <a:xfrm>
-            <a:off x="7424928" y="4407408"/>
-            <a:ext cx="4389120" cy="0"/>
-          </a:xfrm>
-          <a:prstGeom prst="line">
-            <a:avLst/>
-          </a:prstGeom>
-          <a:noFill/>
-          <a:ln w="10160">
-            <a:solidFill>
-              <a:srgbClr val="333333"/>
-            </a:solidFill>
-            <a:prstDash val="solid"/>
-          </a:ln>
-        </p:spPr>
-      </p:sp>
-      <p:pic>
-        <p:nvPicPr>
-          <p:cNvPr id="19" name="Image 4" descr="preencoded.png">    </p:cNvPr>
-          <p:cNvPicPr>
-            <a:picLocks noChangeAspect="1"/>
-          </p:cNvPicPr>
-          <p:nvPr/>
-        </p:nvPicPr>
-        <p:blipFill>
-          <a:blip r:embed="rId6"/>
-          <a:stretch>
-            <a:fillRect/>
-          </a:stretch>
-        </p:blipFill>
-        <p:spPr>
-          <a:xfrm>
-            <a:off x="6812280" y="4553712"/>
-            <a:ext cx="384048" cy="384048"/>
-          </a:xfrm>
-          <a:prstGeom prst="rect">
-            <a:avLst/>
-          </a:prstGeom>
-        </p:spPr>
-      </p:pic>
-      <p:sp>
-        <p:nvSpPr>
-          <p:cNvPr id="20" name="Text 13"/>
-          <p:cNvSpPr/>
-          <p:nvPr/>
-        </p:nvSpPr>
-        <p:spPr>
-          <a:xfrm>
-            <a:off x="7424928" y="4535424"/>
-            <a:ext cx="4389120" cy="402336"/>
-          </a:xfrm>
-          <a:prstGeom prst="rect">
-            <a:avLst/>
-          </a:prstGeom>
-          <a:noFill/>
-          <a:ln/>
-        </p:spPr>
-        <p:txBody>
-          <a:bodyPr wrap="square" lIns="0" tIns="0" rIns="0" bIns="0" rtlCol="0" anchor="ctr"/>
-          <a:lstStyle/>
-          <a:p>
-            <a:pPr indent="0" marL="0">
-              <a:buNone/>
-            </a:pPr>
-            <a:r>
-              <a:rPr lang="en-US" sz="1450" b="1" dirty="0">
-                <a:solidFill>
-                  <a:srgbClr val="FFC200"/>
-                </a:solidFill>
-                <a:latin typeface="Arial" pitchFamily="34" charset="0"/>
-                <a:ea typeface="Arial" pitchFamily="34" charset="-122"/>
-                <a:cs typeface="Arial" pitchFamily="34" charset="-120"/>
-              </a:rPr>
-              <a:t>Adv.fee per month:  </a:t>
-            </a:r>
-            <a:pPr indent="0" marL="0">
-              <a:buNone/>
-            </a:pPr>
-            <a:r>
-              <a:rPr lang="en-US" sz="1450" b="1" dirty="0">
-                <a:solidFill>
-                  <a:srgbClr val="FFFFFF"/>
-                </a:solidFill>
-                <a:latin typeface="Arial" pitchFamily="34" charset="0"/>
-                <a:ea typeface="Arial" pitchFamily="34" charset="-122"/>
-                <a:cs typeface="Arial" pitchFamily="34" charset="-120"/>
-              </a:rPr>
-              <a:t>₹ 2,50,000/-</a:t>
-            </a:r>
-            <a:endParaRPr lang="en-US" sz="1450" dirty="0"/>
-          </a:p>
-        </p:txBody>
-      </p:sp>
-      <p:sp>
-        <p:nvSpPr>
-          <p:cNvPr id="21" name="Shape 14"/>
-          <p:cNvSpPr/>
-          <p:nvPr/>
-        </p:nvSpPr>
-        <p:spPr>
-          <a:xfrm>
-            <a:off x="7424928" y="4974336"/>
-            <a:ext cx="4389120" cy="0"/>
-          </a:xfrm>
-          <a:prstGeom prst="line">
-            <a:avLst/>
-          </a:prstGeom>
-          <a:noFill/>
-          <a:ln w="10160">
-            <a:solidFill>
-              <a:srgbClr val="333333"/>
-            </a:solidFill>
-            <a:prstDash val="solid"/>
-          </a:ln>
-        </p:spPr>
-      </p:sp>
-      <p:pic>
-        <p:nvPicPr>
-          <p:cNvPr id="22" name="Image 5" descr="preencoded.png">    </p:cNvPr>
-          <p:cNvPicPr>
-            <a:picLocks noChangeAspect="1"/>
-          </p:cNvPicPr>
-          <p:nvPr/>
-        </p:nvPicPr>
-        <p:blipFill>
-          <a:blip r:embed="rId7"/>
-          <a:stretch>
-            <a:fillRect/>
-          </a:stretch>
-        </p:blipFill>
-        <p:spPr>
-          <a:xfrm>
-            <a:off x="6812280" y="5120640"/>
-            <a:ext cx="384048" cy="384048"/>
-          </a:xfrm>
-          <a:prstGeom prst="rect">
-            <a:avLst/>
-          </a:prstGeom>
-        </p:spPr>
-      </p:pic>
-      <p:sp>
-        <p:nvSpPr>
-          <p:cNvPr id="23" name="Text 15"/>
-          <p:cNvSpPr/>
-          <p:nvPr/>
-        </p:nvSpPr>
-        <p:spPr>
-          <a:xfrm>
-            <a:off x="7424928" y="5102352"/>
-            <a:ext cx="4389120" cy="402336"/>
-          </a:xfrm>
-          <a:prstGeom prst="rect">
-            <a:avLst/>
-          </a:prstGeom>
-          <a:noFill/>
-          <a:ln/>
-        </p:spPr>
-        <p:txBody>
-          <a:bodyPr wrap="square" lIns="0" tIns="0" rIns="0" bIns="0" rtlCol="0" anchor="ctr"/>
-          <a:lstStyle/>
-          <a:p>
-            <a:pPr indent="0" marL="0">
-              <a:buNone/>
-            </a:pPr>
-            <a:r>
-              <a:rPr lang="en-US" sz="1450" b="1" dirty="0">
-                <a:solidFill>
-                  <a:srgbClr val="FFC200"/>
-                </a:solidFill>
-                <a:latin typeface="Arial" pitchFamily="34" charset="0"/>
-                <a:ea typeface="Arial" pitchFamily="34" charset="-122"/>
-                <a:cs typeface="Arial" pitchFamily="34" charset="-120"/>
-              </a:rPr>
-              <a:t>Availability:  </a:t>
-            </a:r>
-            <a:pPr indent="0" marL="0">
-              <a:buNone/>
-            </a:pPr>
-            <a:r>
-              <a:rPr lang="en-US" sz="1450" b="1" dirty="0">
-                <a:solidFill>
-                  <a:srgbClr val="FFFFFF"/>
-                </a:solidFill>
-                <a:latin typeface="Arial" pitchFamily="34" charset="0"/>
-                <a:ea typeface="Arial" pitchFamily="34" charset="-122"/>
-                <a:cs typeface="Arial" pitchFamily="34" charset="-120"/>
-              </a:rPr>
-              <a:t>Available</a:t>
-            </a:r>
-            <a:endParaRPr lang="en-US" sz="1450" dirty="0"/>
-          </a:p>
-        </p:txBody>
-      </p:sp>
-      <p:sp>
-        <p:nvSpPr>
-          <p:cNvPr id="24" name="Shape 16"/>
-          <p:cNvSpPr/>
-          <p:nvPr/>
-        </p:nvSpPr>
-        <p:spPr>
-          <a:xfrm>
-            <a:off x="7424928" y="5541264"/>
-            <a:ext cx="4389120" cy="0"/>
-          </a:xfrm>
-          <a:prstGeom prst="line">
-            <a:avLst/>
-          </a:prstGeom>
-          <a:noFill/>
-          <a:ln w="10160">
-            <a:solidFill>
-              <a:srgbClr val="333333"/>
-            </a:solidFill>
-            <a:prstDash val="solid"/>
-          </a:ln>
-        </p:spPr>
-      </p:sp>
-      <p:pic>
-        <p:nvPicPr>
-          <p:cNvPr id="25" name="Image 6" descr="preencoded.png">    </p:cNvPr>
-          <p:cNvPicPr>
-            <a:picLocks noChangeAspect="1"/>
-          </p:cNvPicPr>
-          <p:nvPr/>
-        </p:nvPicPr>
-        <p:blipFill>
-          <a:blip r:embed="rId8"/>
-          <a:stretch>
-            <a:fillRect/>
-          </a:stretch>
-        </p:blipFill>
-        <p:spPr>
-          <a:xfrm>
-            <a:off x="6812280" y="5687568"/>
-            <a:ext cx="384048" cy="384048"/>
-          </a:xfrm>
-          <a:prstGeom prst="rect">
-            <a:avLst/>
-          </a:prstGeom>
-        </p:spPr>
-      </p:pic>
-      <p:sp>
-        <p:nvSpPr>
-          <p:cNvPr id="26" name="Text 17"/>
-          <p:cNvSpPr/>
-          <p:nvPr/>
-        </p:nvSpPr>
-        <p:spPr>
-          <a:xfrm>
-            <a:off x="7424928" y="5669280"/>
-            <a:ext cx="4389120" cy="402336"/>
-          </a:xfrm>
-          <a:prstGeom prst="rect">
-            <a:avLst/>
-          </a:prstGeom>
-          <a:noFill/>
-          <a:ln/>
-        </p:spPr>
-        <p:txBody>
-          <a:bodyPr wrap="square" lIns="0" tIns="0" rIns="0" bIns="0" rtlCol="0" anchor="ctr"/>
-          <a:lstStyle/>
-          <a:p>
-            <a:pPr indent="0" marL="0">
-              <a:buNone/>
-            </a:pPr>
-            <a:r>
-              <a:rPr lang="en-US" sz="1450" b="1" dirty="0">
-                <a:solidFill>
-                  <a:srgbClr val="FFC200"/>
-                </a:solidFill>
-                <a:latin typeface="Arial" pitchFamily="34" charset="0"/>
-                <a:ea typeface="Arial" pitchFamily="34" charset="-122"/>
-                <a:cs typeface="Arial" pitchFamily="34" charset="-120"/>
-              </a:rPr>
-              <a:t>Location Coordinates:  </a:t>
-            </a:r>
-            <a:pPr indent="0" marL="0">
-              <a:buNone/>
-            </a:pPr>
-            <a:r>
-              <a:rPr lang="en-US" sz="1450" b="1" dirty="0">
-                <a:solidFill>
-                  <a:srgbClr val="FFFFFF"/>
-                </a:solidFill>
-                <a:latin typeface="Arial" pitchFamily="34" charset="0"/>
-                <a:ea typeface="Arial" pitchFamily="34" charset="-122"/>
-                <a:cs typeface="Arial" pitchFamily="34" charset="-120"/>
-              </a:rPr>
-              <a:t>23.012345, 72.567890</a:t>
-            </a:r>
-            <a:endParaRPr lang="en-US" sz="1450" dirty="0"/>
-          </a:p>
-        </p:txBody>
-      </p:sp>
-    </p:spTree>
-  </p:cSld>
-  <p:clrMapOvr>
-    <a:masterClrMapping/>
-  </p:clrMapOvr>
-</p:sld>
-</file>
-
 <file path=ppt/slides/slide5.xml><?xml version="1.0" encoding="utf-8"?>
 <p:sld xmlns:a="http://schemas.openxmlformats.org/drawingml/2006/main" xmlns:r="http://schemas.openxmlformats.org/officeDocument/2006/relationships" xmlns:p="http://schemas.openxmlformats.org/presentationml/2006/main">
   <p:cSld name="Slide 5">
